--- a/public/lessons/year-6-maths/autumn/week-2/round-to-ten-thousand-hundred-thousand-and-one-million/teaching-powerpoint-v1.pptx
+++ b/public/lessons/year-6-maths/autumn/week-2/round-to-ten-thousand-hundred-thousand-and-one-million/teaching-powerpoint-v1.pptx
@@ -2,24 +2,24 @@
 <file path=ppt/presentation.xml><?xml version="1.0" encoding="utf-8"?>
 <p:presentation xmlns:p="http://schemas.openxmlformats.org/presentationml/2006/main">
   <p:sldMasterIdLst>
-    <p:sldMasterId xmlns:r="http://schemas.openxmlformats.org/officeDocument/2006/relationships" id="2147483648" r:id="R69d809a56e294147"/>
+    <p:sldMasterId xmlns:r="http://schemas.openxmlformats.org/officeDocument/2006/relationships" id="2147483648" r:id="R18832fb4d82843ba"/>
   </p:sldMasterIdLst>
   <p:notesMasterIdLst>
-    <p:notesMasterId xmlns:r="http://schemas.openxmlformats.org/officeDocument/2006/relationships" r:id="R2541e93f1cf8469b"/>
+    <p:notesMasterId xmlns:r="http://schemas.openxmlformats.org/officeDocument/2006/relationships" r:id="R69b573fd7a0f4d5a"/>
   </p:notesMasterIdLst>
   <p:sldIdLst>
-    <p:sldId xmlns:r="http://schemas.openxmlformats.org/officeDocument/2006/relationships" id="256" r:id="R3a663a2ac8b54a2b"/>
-    <p:sldId xmlns:r="http://schemas.openxmlformats.org/officeDocument/2006/relationships" id="257" r:id="R742dd55c0dd04199"/>
-    <p:sldId xmlns:r="http://schemas.openxmlformats.org/officeDocument/2006/relationships" id="258" r:id="R37bb59538de24b78"/>
-    <p:sldId xmlns:r="http://schemas.openxmlformats.org/officeDocument/2006/relationships" id="259" r:id="R06ff8147bb4b45a5"/>
-    <p:sldId xmlns:r="http://schemas.openxmlformats.org/officeDocument/2006/relationships" id="260" r:id="R1d743401944d4e66"/>
-    <p:sldId xmlns:r="http://schemas.openxmlformats.org/officeDocument/2006/relationships" id="261" r:id="Rd3ecab9c51b24590"/>
-    <p:sldId xmlns:r="http://schemas.openxmlformats.org/officeDocument/2006/relationships" id="262" r:id="R46b2ecf6b5734262"/>
-    <p:sldId xmlns:r="http://schemas.openxmlformats.org/officeDocument/2006/relationships" id="263" r:id="R251cea2433a74202"/>
-    <p:sldId xmlns:r="http://schemas.openxmlformats.org/officeDocument/2006/relationships" id="264" r:id="R8e9bf0979f2444be"/>
-    <p:sldId xmlns:r="http://schemas.openxmlformats.org/officeDocument/2006/relationships" id="265" r:id="Ra23d43f0d2794409"/>
-    <p:sldId xmlns:r="http://schemas.openxmlformats.org/officeDocument/2006/relationships" id="266" r:id="Rddd07f07b66149af"/>
-    <p:sldId xmlns:r="http://schemas.openxmlformats.org/officeDocument/2006/relationships" id="267" r:id="Rafdf8f0131764a7d"/>
+    <p:sldId xmlns:r="http://schemas.openxmlformats.org/officeDocument/2006/relationships" id="256" r:id="R5b7e82c274b347f7"/>
+    <p:sldId xmlns:r="http://schemas.openxmlformats.org/officeDocument/2006/relationships" id="257" r:id="R2b654aee920b43a4"/>
+    <p:sldId xmlns:r="http://schemas.openxmlformats.org/officeDocument/2006/relationships" id="258" r:id="R40252aab29994332"/>
+    <p:sldId xmlns:r="http://schemas.openxmlformats.org/officeDocument/2006/relationships" id="259" r:id="R5e4edebf46ce43f3"/>
+    <p:sldId xmlns:r="http://schemas.openxmlformats.org/officeDocument/2006/relationships" id="260" r:id="Ra2b019abf1a843da"/>
+    <p:sldId xmlns:r="http://schemas.openxmlformats.org/officeDocument/2006/relationships" id="261" r:id="R3fa8d471ba2943d7"/>
+    <p:sldId xmlns:r="http://schemas.openxmlformats.org/officeDocument/2006/relationships" id="262" r:id="R4dbe13dc742b4260"/>
+    <p:sldId xmlns:r="http://schemas.openxmlformats.org/officeDocument/2006/relationships" id="263" r:id="R9edf4ae191fe4c41"/>
+    <p:sldId xmlns:r="http://schemas.openxmlformats.org/officeDocument/2006/relationships" id="264" r:id="R979d30005df94c62"/>
+    <p:sldId xmlns:r="http://schemas.openxmlformats.org/officeDocument/2006/relationships" id="265" r:id="Ra93d5d402b56425e"/>
+    <p:sldId xmlns:r="http://schemas.openxmlformats.org/officeDocument/2006/relationships" id="266" r:id="R1eeb5c62a17f4d29"/>
+    <p:sldId xmlns:r="http://schemas.openxmlformats.org/officeDocument/2006/relationships" id="267" r:id="R8798c88b82be4bc9"/>
   </p:sldIdLst>
   <p:sldSz cx="12192000" cy="6858000"/>
   <p:notesSz cx="6858000" cy="9144000"/>
@@ -873,7 +873,7 @@
           <a:lstStyle xmlns:a="http://schemas.openxmlformats.org/drawingml/2006/main"/>
           <a:p xmlns:a="http://schemas.openxmlformats.org/drawingml/2006/main">
             <a:r>
-              <a:t>I do. Reveal the question, setup and each calculation stage one click at a time. Pupils watch before copying. Model answer: 6,750,000; 6,700,000; 7,000,000.</a:t>
+              <a:t>I do. Reveal the question, then reveal each mathematical change one click at a time. Point to the numbers and operation that changed before moving to the next line. Final answer: 6,750,000; 6,700,000; 7,000,000.</a:t>
             </a:r>
           </a:p>
         </p:txBody>
@@ -1291,7 +1291,7 @@
   </p:cSld>
   <p:clrMap bg1="lt1" tx1="dk1" bg2="lt2" tx2="dk2" accent1="accent1" accent2="accent2" accent3="accent3" accent4="accent4" accent5="accent5" accent6="accent6" hlink="hlink" folHlink="folHlink"/>
   <p:sldLayoutIdLst>
-    <p:sldLayoutId xmlns:r="http://schemas.openxmlformats.org/officeDocument/2006/relationships" id="2147483649" r:id="Rf091548ce5a3462c"/>
+    <p:sldLayoutId xmlns:r="http://schemas.openxmlformats.org/officeDocument/2006/relationships" id="2147483649" r:id="R93bf9e50d5af4c89"/>
   </p:sldLayoutIdLst>
   <p:txStyles>
     <p:titleStyle>
@@ -1842,7 +1842,7 @@
           <p:cNvPr id="12" name="">
             <a:extLst xmlns:a="http://schemas.openxmlformats.org/drawingml/2006/main">
               <a:ext uri="{FF2B5EF4-FFF2-40B4-BE49-F238E27FC236}">
-                <a16:creationId xmlns:a16="http://schemas.microsoft.com/office/drawing/2014/main" id="{E887D1B0-D836-4441-BFEA-280D89BEFCD8}"/>
+                <a16:creationId xmlns:a16="http://schemas.microsoft.com/office/drawing/2014/main" id="{824489ED-5651-46C2-8B8A-7B07EF749BEB}"/>
               </a:ext>
             </a:extLst>
           </p:cNvPr>
@@ -1874,7 +1874,7 @@
           <p:cNvPr id="2" name="">
             <a:extLst xmlns:a="http://schemas.openxmlformats.org/drawingml/2006/main">
               <a:ext uri="{FF2B5EF4-FFF2-40B4-BE49-F238E27FC236}">
-                <a16:creationId xmlns:a16="http://schemas.microsoft.com/office/drawing/2014/main" id="{CA27AF0F-C1D6-4021-8577-B0A8F83FCA65}"/>
+                <a16:creationId xmlns:a16="http://schemas.microsoft.com/office/drawing/2014/main" id="{3B5B9DED-9E0B-473B-9DD9-595E5309BC66}"/>
               </a:ext>
             </a:extLst>
           </p:cNvPr>
@@ -1931,7 +1931,7 @@
           <p:cNvPr id="3" name="">
             <a:extLst xmlns:a="http://schemas.openxmlformats.org/drawingml/2006/main">
               <a:ext uri="{FF2B5EF4-FFF2-40B4-BE49-F238E27FC236}">
-                <a16:creationId xmlns:a16="http://schemas.microsoft.com/office/drawing/2014/main" id="{025EF116-99A3-427B-9AA8-8F03610B7829}"/>
+                <a16:creationId xmlns:a16="http://schemas.microsoft.com/office/drawing/2014/main" id="{A0124DB1-9B4E-4CD9-9AC7-1049A2966215}"/>
               </a:ext>
             </a:extLst>
           </p:cNvPr>
@@ -1965,7 +1965,7 @@
           <p:cNvPr id="4" name="">
             <a:extLst xmlns:a="http://schemas.openxmlformats.org/drawingml/2006/main">
               <a:ext uri="{FF2B5EF4-FFF2-40B4-BE49-F238E27FC236}">
-                <a16:creationId xmlns:a16="http://schemas.microsoft.com/office/drawing/2014/main" id="{94A8100A-FF6E-4617-8216-27AC109EDAFE}"/>
+                <a16:creationId xmlns:a16="http://schemas.microsoft.com/office/drawing/2014/main" id="{E1875ECF-BFF3-4825-9CF5-490DE23773C7}"/>
               </a:ext>
             </a:extLst>
           </p:cNvPr>
@@ -2022,7 +2022,7 @@
           <p:cNvPr id="5" name="">
             <a:extLst xmlns:a="http://schemas.openxmlformats.org/drawingml/2006/main">
               <a:ext uri="{FF2B5EF4-FFF2-40B4-BE49-F238E27FC236}">
-                <a16:creationId xmlns:a16="http://schemas.microsoft.com/office/drawing/2014/main" id="{B3018E54-89A7-49FD-BB05-25B48EF1C1FA}"/>
+                <a16:creationId xmlns:a16="http://schemas.microsoft.com/office/drawing/2014/main" id="{F1F693A7-37EE-432E-B2FF-A6298C6A97FE}"/>
               </a:ext>
             </a:extLst>
           </p:cNvPr>
@@ -2079,7 +2079,7 @@
           <p:cNvPr id="6" name="">
             <a:extLst xmlns:a="http://schemas.openxmlformats.org/drawingml/2006/main">
               <a:ext uri="{FF2B5EF4-FFF2-40B4-BE49-F238E27FC236}">
-                <a16:creationId xmlns:a16="http://schemas.microsoft.com/office/drawing/2014/main" id="{070ECFCE-13D5-4C45-8261-B4EF0AEEDCDA}"/>
+                <a16:creationId xmlns:a16="http://schemas.microsoft.com/office/drawing/2014/main" id="{42FF0B58-CBBB-4BB8-B41C-A5E2A725C074}"/>
               </a:ext>
             </a:extLst>
           </p:cNvPr>
@@ -2113,7 +2113,7 @@
           <p:cNvPr id="7" name="">
             <a:extLst xmlns:a="http://schemas.openxmlformats.org/drawingml/2006/main">
               <a:ext uri="{FF2B5EF4-FFF2-40B4-BE49-F238E27FC236}">
-                <a16:creationId xmlns:a16="http://schemas.microsoft.com/office/drawing/2014/main" id="{DCF66F2F-5A3B-4F8C-9482-AD6936A707D3}"/>
+                <a16:creationId xmlns:a16="http://schemas.microsoft.com/office/drawing/2014/main" id="{3779FC10-4F44-4E5D-8A8D-3E8B479EB7AB}"/>
               </a:ext>
             </a:extLst>
           </p:cNvPr>
@@ -2170,7 +2170,7 @@
           <p:cNvPr id="8" name="">
             <a:extLst xmlns:a="http://schemas.openxmlformats.org/drawingml/2006/main">
               <a:ext uri="{FF2B5EF4-FFF2-40B4-BE49-F238E27FC236}">
-                <a16:creationId xmlns:a16="http://schemas.microsoft.com/office/drawing/2014/main" id="{5532356A-5F13-4745-B58D-CB74D216E1FD}"/>
+                <a16:creationId xmlns:a16="http://schemas.microsoft.com/office/drawing/2014/main" id="{E1271347-4471-4CF8-B166-76BDEEF4983F}"/>
               </a:ext>
             </a:extLst>
           </p:cNvPr>
@@ -2227,7 +2227,7 @@
           <p:cNvPr id="9" name="">
             <a:extLst xmlns:a="http://schemas.openxmlformats.org/drawingml/2006/main">
               <a:ext uri="{FF2B5EF4-FFF2-40B4-BE49-F238E27FC236}">
-                <a16:creationId xmlns:a16="http://schemas.microsoft.com/office/drawing/2014/main" id="{C9522FFF-8BDA-4C74-AF81-170CCED51E8B}"/>
+                <a16:creationId xmlns:a16="http://schemas.microsoft.com/office/drawing/2014/main" id="{F626011D-6958-4F30-A026-0E95C2DC04D0}"/>
               </a:ext>
             </a:extLst>
           </p:cNvPr>
@@ -2284,7 +2284,7 @@
           <p:cNvPr id="10" name="">
             <a:extLst xmlns:a="http://schemas.openxmlformats.org/drawingml/2006/main">
               <a:ext uri="{FF2B5EF4-FFF2-40B4-BE49-F238E27FC236}">
-                <a16:creationId xmlns:a16="http://schemas.microsoft.com/office/drawing/2014/main" id="{748844A2-DD7F-4CBE-B87C-F9D379655446}"/>
+                <a16:creationId xmlns:a16="http://schemas.microsoft.com/office/drawing/2014/main" id="{3DEEF566-2B0C-45DE-AFB9-4E2DCBE8C352}"/>
               </a:ext>
             </a:extLst>
           </p:cNvPr>
@@ -2341,7 +2341,7 @@
           <p:cNvPr id="11" name="">
             <a:extLst xmlns:a="http://schemas.openxmlformats.org/drawingml/2006/main">
               <a:ext uri="{FF2B5EF4-FFF2-40B4-BE49-F238E27FC236}">
-                <a16:creationId xmlns:a16="http://schemas.microsoft.com/office/drawing/2014/main" id="{31A66864-463B-480F-89DA-74FAA1D230C0}"/>
+                <a16:creationId xmlns:a16="http://schemas.microsoft.com/office/drawing/2014/main" id="{013128D1-23CC-4ED0-B0DC-B96C6CF9F946}"/>
               </a:ext>
             </a:extLst>
           </p:cNvPr>
@@ -2396,7 +2396,7 @@
     </p:spTree>
     <p:extLst>
       <p:ext uri="{BB962C8B-B14F-4D97-AF65-F5344CB8AC3E}">
-        <p14:creationId xmlns:p14="http://schemas.microsoft.com/office/powerpoint/2010/main" val="1928520642"/>
+        <p14:creationId xmlns:p14="http://schemas.microsoft.com/office/powerpoint/2010/main" val="2071979569"/>
       </p:ext>
     </p:extLst>
   </p:cSld>
@@ -2427,7 +2427,7 @@
           <p:cNvPr id="14" name="">
             <a:extLst xmlns:a="http://schemas.openxmlformats.org/drawingml/2006/main">
               <a:ext uri="{FF2B5EF4-FFF2-40B4-BE49-F238E27FC236}">
-                <a16:creationId xmlns:a16="http://schemas.microsoft.com/office/drawing/2014/main" id="{3EB2D552-AF15-43A7-9384-C7C0FF68FE21}"/>
+                <a16:creationId xmlns:a16="http://schemas.microsoft.com/office/drawing/2014/main" id="{80B1DC68-72BF-4D3B-9940-6DA277D734D1}"/>
               </a:ext>
             </a:extLst>
           </p:cNvPr>
@@ -2459,7 +2459,7 @@
           <p:cNvPr id="2" name="">
             <a:extLst xmlns:a="http://schemas.openxmlformats.org/drawingml/2006/main">
               <a:ext uri="{FF2B5EF4-FFF2-40B4-BE49-F238E27FC236}">
-                <a16:creationId xmlns:a16="http://schemas.microsoft.com/office/drawing/2014/main" id="{44EC40F6-5BE0-4856-A969-23D1DAAE8665}"/>
+                <a16:creationId xmlns:a16="http://schemas.microsoft.com/office/drawing/2014/main" id="{C09F966E-AD97-438D-88DB-18F4C449CA34}"/>
               </a:ext>
             </a:extLst>
           </p:cNvPr>
@@ -2516,7 +2516,7 @@
           <p:cNvPr id="3" name="">
             <a:extLst xmlns:a="http://schemas.openxmlformats.org/drawingml/2006/main">
               <a:ext uri="{FF2B5EF4-FFF2-40B4-BE49-F238E27FC236}">
-                <a16:creationId xmlns:a16="http://schemas.microsoft.com/office/drawing/2014/main" id="{BA6FCAE6-69BC-4528-83A3-A6CA9C01B15F}"/>
+                <a16:creationId xmlns:a16="http://schemas.microsoft.com/office/drawing/2014/main" id="{93E49680-92D0-45CA-A810-F42AC7CF573F}"/>
               </a:ext>
             </a:extLst>
           </p:cNvPr>
@@ -2548,7 +2548,7 @@
           <p:cNvPr id="4" name="">
             <a:extLst xmlns:a="http://schemas.openxmlformats.org/drawingml/2006/main">
               <a:ext uri="{FF2B5EF4-FFF2-40B4-BE49-F238E27FC236}">
-                <a16:creationId xmlns:a16="http://schemas.microsoft.com/office/drawing/2014/main" id="{2DFBB9A1-0321-4048-A4B8-3199CE86A063}"/>
+                <a16:creationId xmlns:a16="http://schemas.microsoft.com/office/drawing/2014/main" id="{70003B01-3EFE-4330-B46D-18D3B47454C0}"/>
               </a:ext>
             </a:extLst>
           </p:cNvPr>
@@ -2605,7 +2605,7 @@
           <p:cNvPr id="5" name="">
             <a:extLst xmlns:a="http://schemas.openxmlformats.org/drawingml/2006/main">
               <a:ext uri="{FF2B5EF4-FFF2-40B4-BE49-F238E27FC236}">
-                <a16:creationId xmlns:a16="http://schemas.microsoft.com/office/drawing/2014/main" id="{3337872C-08F7-42BD-9064-F6C964C495A6}"/>
+                <a16:creationId xmlns:a16="http://schemas.microsoft.com/office/drawing/2014/main" id="{39AEF903-7DF4-4E53-9A18-BEECC9F23B4A}"/>
               </a:ext>
             </a:extLst>
           </p:cNvPr>
@@ -2662,7 +2662,7 @@
           <p:cNvPr id="6" name="">
             <a:extLst xmlns:a="http://schemas.openxmlformats.org/drawingml/2006/main">
               <a:ext uri="{FF2B5EF4-FFF2-40B4-BE49-F238E27FC236}">
-                <a16:creationId xmlns:a16="http://schemas.microsoft.com/office/drawing/2014/main" id="{59599160-6E8F-47E5-9F6B-B68C1A054BF4}"/>
+                <a16:creationId xmlns:a16="http://schemas.microsoft.com/office/drawing/2014/main" id="{B305420E-BBE1-4AF2-AA94-8EC613AA4E90}"/>
               </a:ext>
             </a:extLst>
           </p:cNvPr>
@@ -2719,7 +2719,7 @@
           <p:cNvPr id="7" name="">
             <a:extLst xmlns:a="http://schemas.openxmlformats.org/drawingml/2006/main">
               <a:ext uri="{FF2B5EF4-FFF2-40B4-BE49-F238E27FC236}">
-                <a16:creationId xmlns:a16="http://schemas.microsoft.com/office/drawing/2014/main" id="{5F8B9B2B-A635-451C-A551-6C1725F9DCA9}"/>
+                <a16:creationId xmlns:a16="http://schemas.microsoft.com/office/drawing/2014/main" id="{EA750EE9-BE03-4432-9BF3-D3FF5FA31484}"/>
               </a:ext>
             </a:extLst>
           </p:cNvPr>
@@ -2751,7 +2751,7 @@
           <p:cNvPr id="8" name="">
             <a:extLst xmlns:a="http://schemas.openxmlformats.org/drawingml/2006/main">
               <a:ext uri="{FF2B5EF4-FFF2-40B4-BE49-F238E27FC236}">
-                <a16:creationId xmlns:a16="http://schemas.microsoft.com/office/drawing/2014/main" id="{A90A6595-8085-4538-8CFD-8C465C9543D8}"/>
+                <a16:creationId xmlns:a16="http://schemas.microsoft.com/office/drawing/2014/main" id="{D8543CFD-C45E-41F8-B053-E1678A633799}"/>
               </a:ext>
             </a:extLst>
           </p:cNvPr>
@@ -2808,7 +2808,7 @@
           <p:cNvPr id="9" name="">
             <a:extLst xmlns:a="http://schemas.openxmlformats.org/drawingml/2006/main">
               <a:ext uri="{FF2B5EF4-FFF2-40B4-BE49-F238E27FC236}">
-                <a16:creationId xmlns:a16="http://schemas.microsoft.com/office/drawing/2014/main" id="{06DF8CD7-DA56-450B-841E-E59B29882166}"/>
+                <a16:creationId xmlns:a16="http://schemas.microsoft.com/office/drawing/2014/main" id="{5E4AA3E5-2403-40BC-ADD4-6C271D02E6E0}"/>
               </a:ext>
             </a:extLst>
           </p:cNvPr>
@@ -2865,7 +2865,7 @@
           <p:cNvPr id="10" name="">
             <a:extLst xmlns:a="http://schemas.openxmlformats.org/drawingml/2006/main">
               <a:ext uri="{FF2B5EF4-FFF2-40B4-BE49-F238E27FC236}">
-                <a16:creationId xmlns:a16="http://schemas.microsoft.com/office/drawing/2014/main" id="{2721597A-6C3B-48DB-A99E-E66213B3D26B}"/>
+                <a16:creationId xmlns:a16="http://schemas.microsoft.com/office/drawing/2014/main" id="{8FD67F1C-94CD-4491-AA61-0C640B266F73}"/>
               </a:ext>
             </a:extLst>
           </p:cNvPr>
@@ -2922,7 +2922,7 @@
           <p:cNvPr id="11" name="">
             <a:extLst xmlns:a="http://schemas.openxmlformats.org/drawingml/2006/main">
               <a:ext uri="{FF2B5EF4-FFF2-40B4-BE49-F238E27FC236}">
-                <a16:creationId xmlns:a16="http://schemas.microsoft.com/office/drawing/2014/main" id="{76A2CFF2-A5DF-4F21-94E1-3BAB17E37E47}"/>
+                <a16:creationId xmlns:a16="http://schemas.microsoft.com/office/drawing/2014/main" id="{0B88C19D-9182-4A4D-8A5E-D816456924F8}"/>
               </a:ext>
             </a:extLst>
           </p:cNvPr>
@@ -2979,7 +2979,7 @@
           <p:cNvPr id="12" name="">
             <a:extLst xmlns:a="http://schemas.openxmlformats.org/drawingml/2006/main">
               <a:ext uri="{FF2B5EF4-FFF2-40B4-BE49-F238E27FC236}">
-                <a16:creationId xmlns:a16="http://schemas.microsoft.com/office/drawing/2014/main" id="{87B03207-0CD8-4BAE-ABF1-5155E765074B}"/>
+                <a16:creationId xmlns:a16="http://schemas.microsoft.com/office/drawing/2014/main" id="{927D0DF7-203C-4892-AE96-D9EF62B64E4F}"/>
               </a:ext>
             </a:extLst>
           </p:cNvPr>
@@ -3036,7 +3036,7 @@
           <p:cNvPr id="13" name="">
             <a:extLst xmlns:a="http://schemas.openxmlformats.org/drawingml/2006/main">
               <a:ext uri="{FF2B5EF4-FFF2-40B4-BE49-F238E27FC236}">
-                <a16:creationId xmlns:a16="http://schemas.microsoft.com/office/drawing/2014/main" id="{4D2BA9BE-BF7C-48FE-9D96-03D28E71C70E}"/>
+                <a16:creationId xmlns:a16="http://schemas.microsoft.com/office/drawing/2014/main" id="{2E8E330C-502F-461C-80C9-BDB9D2CFA6EA}"/>
               </a:ext>
             </a:extLst>
           </p:cNvPr>
@@ -3091,7 +3091,7 @@
     </p:spTree>
     <p:extLst>
       <p:ext uri="{BB962C8B-B14F-4D97-AF65-F5344CB8AC3E}">
-        <p14:creationId xmlns:p14="http://schemas.microsoft.com/office/powerpoint/2010/main" val="574617982"/>
+        <p14:creationId xmlns:p14="http://schemas.microsoft.com/office/powerpoint/2010/main" val="1003956072"/>
       </p:ext>
     </p:extLst>
   </p:cSld>
@@ -3292,7 +3292,7 @@
           <p:cNvPr id="19" name="">
             <a:extLst xmlns:a="http://schemas.openxmlformats.org/drawingml/2006/main">
               <a:ext uri="{FF2B5EF4-FFF2-40B4-BE49-F238E27FC236}">
-                <a16:creationId xmlns:a16="http://schemas.microsoft.com/office/drawing/2014/main" id="{D10FBF16-1AEB-466B-B253-CCB8B9C407DF}"/>
+                <a16:creationId xmlns:a16="http://schemas.microsoft.com/office/drawing/2014/main" id="{82583AD5-7C99-40D8-BDC9-2F521116BCFA}"/>
               </a:ext>
             </a:extLst>
           </p:cNvPr>
@@ -3324,7 +3324,7 @@
           <p:cNvPr id="2" name="">
             <a:extLst xmlns:a="http://schemas.openxmlformats.org/drawingml/2006/main">
               <a:ext uri="{FF2B5EF4-FFF2-40B4-BE49-F238E27FC236}">
-                <a16:creationId xmlns:a16="http://schemas.microsoft.com/office/drawing/2014/main" id="{2234451D-E5F1-4860-93DA-3E7A2B5A337B}"/>
+                <a16:creationId xmlns:a16="http://schemas.microsoft.com/office/drawing/2014/main" id="{8D3B67BD-8A3B-45B8-B9A5-7A8AE77D0612}"/>
               </a:ext>
             </a:extLst>
           </p:cNvPr>
@@ -3381,7 +3381,7 @@
           <p:cNvPr id="3" name="">
             <a:extLst xmlns:a="http://schemas.openxmlformats.org/drawingml/2006/main">
               <a:ext uri="{FF2B5EF4-FFF2-40B4-BE49-F238E27FC236}">
-                <a16:creationId xmlns:a16="http://schemas.microsoft.com/office/drawing/2014/main" id="{A4BB7513-6D98-464B-A83A-EC73E9FA6618}"/>
+                <a16:creationId xmlns:a16="http://schemas.microsoft.com/office/drawing/2014/main" id="{B7AF32D6-AEEC-43EE-B5FE-DA80CF74F0BF}"/>
               </a:ext>
             </a:extLst>
           </p:cNvPr>
@@ -3413,7 +3413,7 @@
           <p:cNvPr id="4" name="">
             <a:extLst xmlns:a="http://schemas.openxmlformats.org/drawingml/2006/main">
               <a:ext uri="{FF2B5EF4-FFF2-40B4-BE49-F238E27FC236}">
-                <a16:creationId xmlns:a16="http://schemas.microsoft.com/office/drawing/2014/main" id="{07BC306A-A7A7-4086-8197-7D7B6712ABAC}"/>
+                <a16:creationId xmlns:a16="http://schemas.microsoft.com/office/drawing/2014/main" id="{0FC3D56D-88A0-41D0-970E-5EEB0537B917}"/>
               </a:ext>
             </a:extLst>
           </p:cNvPr>
@@ -3470,7 +3470,7 @@
           <p:cNvPr id="5" name="">
             <a:extLst xmlns:a="http://schemas.openxmlformats.org/drawingml/2006/main">
               <a:ext uri="{FF2B5EF4-FFF2-40B4-BE49-F238E27FC236}">
-                <a16:creationId xmlns:a16="http://schemas.microsoft.com/office/drawing/2014/main" id="{A6D78B8B-39BC-419C-83C1-A722AF648341}"/>
+                <a16:creationId xmlns:a16="http://schemas.microsoft.com/office/drawing/2014/main" id="{B43591D2-D3B4-4A89-8BC0-B064194D0D11}"/>
               </a:ext>
             </a:extLst>
           </p:cNvPr>
@@ -3527,7 +3527,7 @@
           <p:cNvPr id="6" name="">
             <a:extLst xmlns:a="http://schemas.openxmlformats.org/drawingml/2006/main">
               <a:ext uri="{FF2B5EF4-FFF2-40B4-BE49-F238E27FC236}">
-                <a16:creationId xmlns:a16="http://schemas.microsoft.com/office/drawing/2014/main" id="{7DC2A1D0-37B5-4AD5-9F12-35E8CE97B374}"/>
+                <a16:creationId xmlns:a16="http://schemas.microsoft.com/office/drawing/2014/main" id="{11F18690-7DAF-4C1C-BA4F-D7475B93B697}"/>
               </a:ext>
             </a:extLst>
           </p:cNvPr>
@@ -3584,7 +3584,7 @@
           <p:cNvPr id="7" name="">
             <a:extLst xmlns:a="http://schemas.openxmlformats.org/drawingml/2006/main">
               <a:ext uri="{FF2B5EF4-FFF2-40B4-BE49-F238E27FC236}">
-                <a16:creationId xmlns:a16="http://schemas.microsoft.com/office/drawing/2014/main" id="{D543C58B-D6BB-4DEA-B494-FCCCBB41C7F9}"/>
+                <a16:creationId xmlns:a16="http://schemas.microsoft.com/office/drawing/2014/main" id="{486BF99D-006C-447C-BDD2-F012DE412D06}"/>
               </a:ext>
             </a:extLst>
           </p:cNvPr>
@@ -3616,7 +3616,7 @@
           <p:cNvPr id="8" name="">
             <a:extLst xmlns:a="http://schemas.openxmlformats.org/drawingml/2006/main">
               <a:ext uri="{FF2B5EF4-FFF2-40B4-BE49-F238E27FC236}">
-                <a16:creationId xmlns:a16="http://schemas.microsoft.com/office/drawing/2014/main" id="{48A1E662-934C-4970-9DF0-606CDBAED92F}"/>
+                <a16:creationId xmlns:a16="http://schemas.microsoft.com/office/drawing/2014/main" id="{1E01856E-F588-4ED3-8DB2-3C5280545D18}"/>
               </a:ext>
             </a:extLst>
           </p:cNvPr>
@@ -3673,7 +3673,7 @@
           <p:cNvPr id="9" name="">
             <a:extLst xmlns:a="http://schemas.openxmlformats.org/drawingml/2006/main">
               <a:ext uri="{FF2B5EF4-FFF2-40B4-BE49-F238E27FC236}">
-                <a16:creationId xmlns:a16="http://schemas.microsoft.com/office/drawing/2014/main" id="{D632DD18-9E1D-41C0-996F-82B86F82DCDF}"/>
+                <a16:creationId xmlns:a16="http://schemas.microsoft.com/office/drawing/2014/main" id="{EA77AB81-5CD8-4AD3-BF4A-B5B32A6E06A9}"/>
               </a:ext>
             </a:extLst>
           </p:cNvPr>
@@ -3730,7 +3730,7 @@
           <p:cNvPr id="10" name="">
             <a:extLst xmlns:a="http://schemas.openxmlformats.org/drawingml/2006/main">
               <a:ext uri="{FF2B5EF4-FFF2-40B4-BE49-F238E27FC236}">
-                <a16:creationId xmlns:a16="http://schemas.microsoft.com/office/drawing/2014/main" id="{CF6AAB79-D5F9-4C3C-BC73-A695FE7EDCBD}"/>
+                <a16:creationId xmlns:a16="http://schemas.microsoft.com/office/drawing/2014/main" id="{17157C8A-5D59-4C4F-8C3A-A2EAAAA7F7BB}"/>
               </a:ext>
             </a:extLst>
           </p:cNvPr>
@@ -3787,7 +3787,7 @@
           <p:cNvPr id="11" name="">
             <a:extLst xmlns:a="http://schemas.openxmlformats.org/drawingml/2006/main">
               <a:ext uri="{FF2B5EF4-FFF2-40B4-BE49-F238E27FC236}">
-                <a16:creationId xmlns:a16="http://schemas.microsoft.com/office/drawing/2014/main" id="{41138219-09C6-4A78-9A33-77EA1C3B3761}"/>
+                <a16:creationId xmlns:a16="http://schemas.microsoft.com/office/drawing/2014/main" id="{4FBD9FF7-1E87-4AF8-ADDB-9D40E269F1EA}"/>
               </a:ext>
             </a:extLst>
           </p:cNvPr>
@@ -3821,7 +3821,7 @@
           <p:cNvPr id="12" name="">
             <a:extLst xmlns:a="http://schemas.openxmlformats.org/drawingml/2006/main">
               <a:ext uri="{FF2B5EF4-FFF2-40B4-BE49-F238E27FC236}">
-                <a16:creationId xmlns:a16="http://schemas.microsoft.com/office/drawing/2014/main" id="{13CDFEAD-99AC-429D-AB36-BF60C04441F5}"/>
+                <a16:creationId xmlns:a16="http://schemas.microsoft.com/office/drawing/2014/main" id="{DB204A16-96A2-4E55-BE43-565AD2DB8A45}"/>
               </a:ext>
             </a:extLst>
           </p:cNvPr>
@@ -3878,7 +3878,7 @@
           <p:cNvPr id="13" name="">
             <a:extLst xmlns:a="http://schemas.openxmlformats.org/drawingml/2006/main">
               <a:ext uri="{FF2B5EF4-FFF2-40B4-BE49-F238E27FC236}">
-                <a16:creationId xmlns:a16="http://schemas.microsoft.com/office/drawing/2014/main" id="{45476215-8631-4479-A736-5D8B4DC95C43}"/>
+                <a16:creationId xmlns:a16="http://schemas.microsoft.com/office/drawing/2014/main" id="{1277BEDE-3F9D-40EF-B78D-4FF3AA6B7C09}"/>
               </a:ext>
             </a:extLst>
           </p:cNvPr>
@@ -3935,7 +3935,7 @@
           <p:cNvPr id="14" name="">
             <a:extLst xmlns:a="http://schemas.openxmlformats.org/drawingml/2006/main">
               <a:ext uri="{FF2B5EF4-FFF2-40B4-BE49-F238E27FC236}">
-                <a16:creationId xmlns:a16="http://schemas.microsoft.com/office/drawing/2014/main" id="{132D0CA0-B2F4-4A66-945A-57F35BF51D29}"/>
+                <a16:creationId xmlns:a16="http://schemas.microsoft.com/office/drawing/2014/main" id="{65A16481-1D53-4DB3-94CC-130C2C2CC985}"/>
               </a:ext>
             </a:extLst>
           </p:cNvPr>
@@ -3992,7 +3992,7 @@
           <p:cNvPr id="15" name="">
             <a:extLst xmlns:a="http://schemas.openxmlformats.org/drawingml/2006/main">
               <a:ext uri="{FF2B5EF4-FFF2-40B4-BE49-F238E27FC236}">
-                <a16:creationId xmlns:a16="http://schemas.microsoft.com/office/drawing/2014/main" id="{12CCE47E-5A20-497D-9713-3D32BCA10284}"/>
+                <a16:creationId xmlns:a16="http://schemas.microsoft.com/office/drawing/2014/main" id="{AD1AE952-BFEC-4734-9CD2-32F11DABA864}"/>
               </a:ext>
             </a:extLst>
           </p:cNvPr>
@@ -4026,7 +4026,7 @@
           <p:cNvPr id="16" name="">
             <a:extLst xmlns:a="http://schemas.openxmlformats.org/drawingml/2006/main">
               <a:ext uri="{FF2B5EF4-FFF2-40B4-BE49-F238E27FC236}">
-                <a16:creationId xmlns:a16="http://schemas.microsoft.com/office/drawing/2014/main" id="{FEF43312-E63A-48CB-9CE7-20EBDE7BBE49}"/>
+                <a16:creationId xmlns:a16="http://schemas.microsoft.com/office/drawing/2014/main" id="{AA2D901B-918B-4247-B082-B152E689AAFA}"/>
               </a:ext>
             </a:extLst>
           </p:cNvPr>
@@ -4083,7 +4083,7 @@
           <p:cNvPr id="17" name="">
             <a:extLst xmlns:a="http://schemas.openxmlformats.org/drawingml/2006/main">
               <a:ext uri="{FF2B5EF4-FFF2-40B4-BE49-F238E27FC236}">
-                <a16:creationId xmlns:a16="http://schemas.microsoft.com/office/drawing/2014/main" id="{33DAAC29-A1EC-4BBC-9E09-D517848CAB27}"/>
+                <a16:creationId xmlns:a16="http://schemas.microsoft.com/office/drawing/2014/main" id="{4414F75E-2669-4E42-90F9-0BE43B29FEF8}"/>
               </a:ext>
             </a:extLst>
           </p:cNvPr>
@@ -4140,7 +4140,7 @@
           <p:cNvPr id="18" name="">
             <a:extLst xmlns:a="http://schemas.openxmlformats.org/drawingml/2006/main">
               <a:ext uri="{FF2B5EF4-FFF2-40B4-BE49-F238E27FC236}">
-                <a16:creationId xmlns:a16="http://schemas.microsoft.com/office/drawing/2014/main" id="{06047F22-23A5-461A-9CEB-7B19F87C06B2}"/>
+                <a16:creationId xmlns:a16="http://schemas.microsoft.com/office/drawing/2014/main" id="{79CAF515-7E61-4F51-9036-2A60BB891220}"/>
               </a:ext>
             </a:extLst>
           </p:cNvPr>
@@ -4195,7 +4195,7 @@
     </p:spTree>
     <p:extLst>
       <p:ext uri="{BB962C8B-B14F-4D97-AF65-F5344CB8AC3E}">
-        <p14:creationId xmlns:p14="http://schemas.microsoft.com/office/powerpoint/2010/main" val="86744246"/>
+        <p14:creationId xmlns:p14="http://schemas.microsoft.com/office/powerpoint/2010/main" val="1927118423"/>
       </p:ext>
     </p:extLst>
   </p:cSld>
@@ -4350,7 +4350,7 @@
           <p:cNvPr id="23" name="">
             <a:extLst xmlns:a="http://schemas.openxmlformats.org/drawingml/2006/main">
               <a:ext uri="{FF2B5EF4-FFF2-40B4-BE49-F238E27FC236}">
-                <a16:creationId xmlns:a16="http://schemas.microsoft.com/office/drawing/2014/main" id="{D2FB249C-579B-410F-A5E7-8B9D86404046}"/>
+                <a16:creationId xmlns:a16="http://schemas.microsoft.com/office/drawing/2014/main" id="{9CCC0DC2-6841-486D-9E98-754B4C68D12B}"/>
               </a:ext>
             </a:extLst>
           </p:cNvPr>
@@ -4382,7 +4382,7 @@
           <p:cNvPr id="2" name="">
             <a:extLst xmlns:a="http://schemas.openxmlformats.org/drawingml/2006/main">
               <a:ext uri="{FF2B5EF4-FFF2-40B4-BE49-F238E27FC236}">
-                <a16:creationId xmlns:a16="http://schemas.microsoft.com/office/drawing/2014/main" id="{AC4C9613-F151-48E2-AB21-0D203DCD01EE}"/>
+                <a16:creationId xmlns:a16="http://schemas.microsoft.com/office/drawing/2014/main" id="{3C3E9ECF-F670-4373-92AE-0FA5CAFFD8E9}"/>
               </a:ext>
             </a:extLst>
           </p:cNvPr>
@@ -4439,7 +4439,7 @@
           <p:cNvPr id="3" name="">
             <a:extLst xmlns:a="http://schemas.openxmlformats.org/drawingml/2006/main">
               <a:ext uri="{FF2B5EF4-FFF2-40B4-BE49-F238E27FC236}">
-                <a16:creationId xmlns:a16="http://schemas.microsoft.com/office/drawing/2014/main" id="{9E63E676-A635-4128-9FD1-9432F37B50B2}"/>
+                <a16:creationId xmlns:a16="http://schemas.microsoft.com/office/drawing/2014/main" id="{B8E2C442-E407-48C1-9BFC-5E89C02AE265}"/>
               </a:ext>
             </a:extLst>
           </p:cNvPr>
@@ -4471,7 +4471,7 @@
           <p:cNvPr id="4" name="">
             <a:extLst xmlns:a="http://schemas.openxmlformats.org/drawingml/2006/main">
               <a:ext uri="{FF2B5EF4-FFF2-40B4-BE49-F238E27FC236}">
-                <a16:creationId xmlns:a16="http://schemas.microsoft.com/office/drawing/2014/main" id="{BCA6B151-EE81-48EF-9C0D-1BC3F71DD1D0}"/>
+                <a16:creationId xmlns:a16="http://schemas.microsoft.com/office/drawing/2014/main" id="{AC5DA145-0019-4EDA-8543-568ABC5E20B2}"/>
               </a:ext>
             </a:extLst>
           </p:cNvPr>
@@ -4528,7 +4528,7 @@
           <p:cNvPr id="5" name="">
             <a:extLst xmlns:a="http://schemas.openxmlformats.org/drawingml/2006/main">
               <a:ext uri="{FF2B5EF4-FFF2-40B4-BE49-F238E27FC236}">
-                <a16:creationId xmlns:a16="http://schemas.microsoft.com/office/drawing/2014/main" id="{E7C77580-C4E3-4573-8B91-DB6C6189778F}"/>
+                <a16:creationId xmlns:a16="http://schemas.microsoft.com/office/drawing/2014/main" id="{18407437-FD78-4181-B81D-02E8DEC710FA}"/>
               </a:ext>
             </a:extLst>
           </p:cNvPr>
@@ -4585,7 +4585,7 @@
           <p:cNvPr id="6" name="">
             <a:extLst xmlns:a="http://schemas.openxmlformats.org/drawingml/2006/main">
               <a:ext uri="{FF2B5EF4-FFF2-40B4-BE49-F238E27FC236}">
-                <a16:creationId xmlns:a16="http://schemas.microsoft.com/office/drawing/2014/main" id="{7E719600-306C-443F-98CC-E09BCB80BE13}"/>
+                <a16:creationId xmlns:a16="http://schemas.microsoft.com/office/drawing/2014/main" id="{7089966C-A3BA-456C-A7E1-477F0A3B131D}"/>
               </a:ext>
             </a:extLst>
           </p:cNvPr>
@@ -4642,7 +4642,7 @@
           <p:cNvPr id="7" name="">
             <a:extLst xmlns:a="http://schemas.openxmlformats.org/drawingml/2006/main">
               <a:ext uri="{FF2B5EF4-FFF2-40B4-BE49-F238E27FC236}">
-                <a16:creationId xmlns:a16="http://schemas.microsoft.com/office/drawing/2014/main" id="{F676F8BD-773C-4AD8-B463-38BCBFBF8B68}"/>
+                <a16:creationId xmlns:a16="http://schemas.microsoft.com/office/drawing/2014/main" id="{CEE238E7-27DD-4CB8-B17F-80661A1C8820}"/>
               </a:ext>
             </a:extLst>
           </p:cNvPr>
@@ -4674,7 +4674,7 @@
           <p:cNvPr id="8" name="">
             <a:extLst xmlns:a="http://schemas.openxmlformats.org/drawingml/2006/main">
               <a:ext uri="{FF2B5EF4-FFF2-40B4-BE49-F238E27FC236}">
-                <a16:creationId xmlns:a16="http://schemas.microsoft.com/office/drawing/2014/main" id="{7CBFE609-5E9B-424A-BE43-5844CD8ABF5B}"/>
+                <a16:creationId xmlns:a16="http://schemas.microsoft.com/office/drawing/2014/main" id="{2577BE5D-BAAC-4986-9DCF-BD147BBE2CA4}"/>
               </a:ext>
             </a:extLst>
           </p:cNvPr>
@@ -4731,7 +4731,7 @@
           <p:cNvPr id="9" name="">
             <a:extLst xmlns:a="http://schemas.openxmlformats.org/drawingml/2006/main">
               <a:ext uri="{FF2B5EF4-FFF2-40B4-BE49-F238E27FC236}">
-                <a16:creationId xmlns:a16="http://schemas.microsoft.com/office/drawing/2014/main" id="{BA111B70-6E2F-455F-98B7-4A12BBDAC845}"/>
+                <a16:creationId xmlns:a16="http://schemas.microsoft.com/office/drawing/2014/main" id="{02219DA0-E643-47E5-95B9-40AF68561E63}"/>
               </a:ext>
             </a:extLst>
           </p:cNvPr>
@@ -4788,7 +4788,7 @@
           <p:cNvPr id="10" name="">
             <a:extLst xmlns:a="http://schemas.openxmlformats.org/drawingml/2006/main">
               <a:ext uri="{FF2B5EF4-FFF2-40B4-BE49-F238E27FC236}">
-                <a16:creationId xmlns:a16="http://schemas.microsoft.com/office/drawing/2014/main" id="{ED282DF1-28F5-4986-B1EF-A20C05FBDB68}"/>
+                <a16:creationId xmlns:a16="http://schemas.microsoft.com/office/drawing/2014/main" id="{3FAA34D9-8C3B-48C9-963E-1263B4DB87F6}"/>
               </a:ext>
             </a:extLst>
           </p:cNvPr>
@@ -4822,7 +4822,7 @@
           <p:cNvPr id="11" name="">
             <a:extLst xmlns:a="http://schemas.openxmlformats.org/drawingml/2006/main">
               <a:ext uri="{FF2B5EF4-FFF2-40B4-BE49-F238E27FC236}">
-                <a16:creationId xmlns:a16="http://schemas.microsoft.com/office/drawing/2014/main" id="{09708205-A3B9-45F8-8701-600F74768AB7}"/>
+                <a16:creationId xmlns:a16="http://schemas.microsoft.com/office/drawing/2014/main" id="{F65ABAA0-7219-4A44-BD6C-EB96BB94E44C}"/>
               </a:ext>
             </a:extLst>
           </p:cNvPr>
@@ -4854,7 +4854,7 @@
           <p:cNvPr id="12" name="">
             <a:extLst xmlns:a="http://schemas.openxmlformats.org/drawingml/2006/main">
               <a:ext uri="{FF2B5EF4-FFF2-40B4-BE49-F238E27FC236}">
-                <a16:creationId xmlns:a16="http://schemas.microsoft.com/office/drawing/2014/main" id="{85870AC9-DF8E-4B7A-BAD0-59B3083158E0}"/>
+                <a16:creationId xmlns:a16="http://schemas.microsoft.com/office/drawing/2014/main" id="{DA4F90B7-5843-4EAA-8AE2-54A48388F063}"/>
               </a:ext>
             </a:extLst>
           </p:cNvPr>
@@ -4911,7 +4911,7 @@
           <p:cNvPr id="13" name="">
             <a:extLst xmlns:a="http://schemas.openxmlformats.org/drawingml/2006/main">
               <a:ext uri="{FF2B5EF4-FFF2-40B4-BE49-F238E27FC236}">
-                <a16:creationId xmlns:a16="http://schemas.microsoft.com/office/drawing/2014/main" id="{727F3343-3C17-4DA7-A197-5A1ACE88CC4D}"/>
+                <a16:creationId xmlns:a16="http://schemas.microsoft.com/office/drawing/2014/main" id="{DE34CDC5-74DC-4581-909A-C14BBE914AEF}"/>
               </a:ext>
             </a:extLst>
           </p:cNvPr>
@@ -4968,7 +4968,7 @@
           <p:cNvPr id="14" name="">
             <a:extLst xmlns:a="http://schemas.openxmlformats.org/drawingml/2006/main">
               <a:ext uri="{FF2B5EF4-FFF2-40B4-BE49-F238E27FC236}">
-                <a16:creationId xmlns:a16="http://schemas.microsoft.com/office/drawing/2014/main" id="{2CCDA2BC-52A4-47B2-997D-BFBA1817EA64}"/>
+                <a16:creationId xmlns:a16="http://schemas.microsoft.com/office/drawing/2014/main" id="{BD7F3D50-A938-485E-9131-2F2684FFFA88}"/>
               </a:ext>
             </a:extLst>
           </p:cNvPr>
@@ -5002,7 +5002,7 @@
           <p:cNvPr id="15" name="">
             <a:extLst xmlns:a="http://schemas.openxmlformats.org/drawingml/2006/main">
               <a:ext uri="{FF2B5EF4-FFF2-40B4-BE49-F238E27FC236}">
-                <a16:creationId xmlns:a16="http://schemas.microsoft.com/office/drawing/2014/main" id="{B63CA4AB-089C-415F-8A13-4591A508A6BD}"/>
+                <a16:creationId xmlns:a16="http://schemas.microsoft.com/office/drawing/2014/main" id="{CDE65D14-38C6-4C8D-8205-C2B26BD5850B}"/>
               </a:ext>
             </a:extLst>
           </p:cNvPr>
@@ -5034,7 +5034,7 @@
           <p:cNvPr id="16" name="">
             <a:extLst xmlns:a="http://schemas.openxmlformats.org/drawingml/2006/main">
               <a:ext uri="{FF2B5EF4-FFF2-40B4-BE49-F238E27FC236}">
-                <a16:creationId xmlns:a16="http://schemas.microsoft.com/office/drawing/2014/main" id="{F3343871-7113-488C-8D06-F0BD7519A371}"/>
+                <a16:creationId xmlns:a16="http://schemas.microsoft.com/office/drawing/2014/main" id="{F109335F-F944-4B95-AD78-D919B8B91133}"/>
               </a:ext>
             </a:extLst>
           </p:cNvPr>
@@ -5091,7 +5091,7 @@
           <p:cNvPr id="17" name="">
             <a:extLst xmlns:a="http://schemas.openxmlformats.org/drawingml/2006/main">
               <a:ext uri="{FF2B5EF4-FFF2-40B4-BE49-F238E27FC236}">
-                <a16:creationId xmlns:a16="http://schemas.microsoft.com/office/drawing/2014/main" id="{356640CD-C3AA-4FFF-96AB-B9DF10BD0486}"/>
+                <a16:creationId xmlns:a16="http://schemas.microsoft.com/office/drawing/2014/main" id="{038A0C6B-7B26-4DC5-9D48-E5B69320CA5C}"/>
               </a:ext>
             </a:extLst>
           </p:cNvPr>
@@ -5148,7 +5148,7 @@
           <p:cNvPr id="18" name="">
             <a:extLst xmlns:a="http://schemas.openxmlformats.org/drawingml/2006/main">
               <a:ext uri="{FF2B5EF4-FFF2-40B4-BE49-F238E27FC236}">
-                <a16:creationId xmlns:a16="http://schemas.microsoft.com/office/drawing/2014/main" id="{C0B28671-11FE-4870-B5B2-34636DB7548B}"/>
+                <a16:creationId xmlns:a16="http://schemas.microsoft.com/office/drawing/2014/main" id="{0C8CCEBB-8A25-40A4-BB3C-E21C6C67E0AA}"/>
               </a:ext>
             </a:extLst>
           </p:cNvPr>
@@ -5182,7 +5182,7 @@
           <p:cNvPr id="19" name="">
             <a:extLst xmlns:a="http://schemas.openxmlformats.org/drawingml/2006/main">
               <a:ext uri="{FF2B5EF4-FFF2-40B4-BE49-F238E27FC236}">
-                <a16:creationId xmlns:a16="http://schemas.microsoft.com/office/drawing/2014/main" id="{BA643E5A-4BAC-483B-A683-B6AD93E86CDE}"/>
+                <a16:creationId xmlns:a16="http://schemas.microsoft.com/office/drawing/2014/main" id="{A1298819-9325-42E5-9BB5-41C333E5168F}"/>
               </a:ext>
             </a:extLst>
           </p:cNvPr>
@@ -5214,7 +5214,7 @@
           <p:cNvPr id="20" name="">
             <a:extLst xmlns:a="http://schemas.openxmlformats.org/drawingml/2006/main">
               <a:ext uri="{FF2B5EF4-FFF2-40B4-BE49-F238E27FC236}">
-                <a16:creationId xmlns:a16="http://schemas.microsoft.com/office/drawing/2014/main" id="{B8D10728-1F44-4FA7-AD11-BFF5792B7A7E}"/>
+                <a16:creationId xmlns:a16="http://schemas.microsoft.com/office/drawing/2014/main" id="{F560FD47-2622-40CE-9768-362D072ECF23}"/>
               </a:ext>
             </a:extLst>
           </p:cNvPr>
@@ -5271,7 +5271,7 @@
           <p:cNvPr id="21" name="">
             <a:extLst xmlns:a="http://schemas.openxmlformats.org/drawingml/2006/main">
               <a:ext uri="{FF2B5EF4-FFF2-40B4-BE49-F238E27FC236}">
-                <a16:creationId xmlns:a16="http://schemas.microsoft.com/office/drawing/2014/main" id="{F5544199-CB5E-4B69-9C77-E893B778AEBE}"/>
+                <a16:creationId xmlns:a16="http://schemas.microsoft.com/office/drawing/2014/main" id="{89086145-413C-4FA1-B824-B12471503F46}"/>
               </a:ext>
             </a:extLst>
           </p:cNvPr>
@@ -5328,7 +5328,7 @@
           <p:cNvPr id="22" name="">
             <a:extLst xmlns:a="http://schemas.openxmlformats.org/drawingml/2006/main">
               <a:ext uri="{FF2B5EF4-FFF2-40B4-BE49-F238E27FC236}">
-                <a16:creationId xmlns:a16="http://schemas.microsoft.com/office/drawing/2014/main" id="{CC8B58B1-6894-4426-8AC4-A25DD0D8980C}"/>
+                <a16:creationId xmlns:a16="http://schemas.microsoft.com/office/drawing/2014/main" id="{B67A9D55-F8AA-4F46-89A4-8A69AF45C139}"/>
               </a:ext>
             </a:extLst>
           </p:cNvPr>
@@ -5383,7 +5383,7 @@
     </p:spTree>
     <p:extLst>
       <p:ext uri="{BB962C8B-B14F-4D97-AF65-F5344CB8AC3E}">
-        <p14:creationId xmlns:p14="http://schemas.microsoft.com/office/powerpoint/2010/main" val="396598881"/>
+        <p14:creationId xmlns:p14="http://schemas.microsoft.com/office/powerpoint/2010/main" val="1774618944"/>
       </p:ext>
     </p:extLst>
   </p:cSld>
@@ -5584,7 +5584,7 @@
           <p:cNvPr id="23" name="">
             <a:extLst xmlns:a="http://schemas.openxmlformats.org/drawingml/2006/main">
               <a:ext uri="{FF2B5EF4-FFF2-40B4-BE49-F238E27FC236}">
-                <a16:creationId xmlns:a16="http://schemas.microsoft.com/office/drawing/2014/main" id="{B36A7658-CF4C-470F-9730-BED1B0A8B7A3}"/>
+                <a16:creationId xmlns:a16="http://schemas.microsoft.com/office/drawing/2014/main" id="{CCFE1D13-03C4-4D98-8388-C77C5B200B35}"/>
               </a:ext>
             </a:extLst>
           </p:cNvPr>
@@ -5616,7 +5616,7 @@
           <p:cNvPr id="2" name="">
             <a:extLst xmlns:a="http://schemas.openxmlformats.org/drawingml/2006/main">
               <a:ext uri="{FF2B5EF4-FFF2-40B4-BE49-F238E27FC236}">
-                <a16:creationId xmlns:a16="http://schemas.microsoft.com/office/drawing/2014/main" id="{99548B74-5980-4DEF-9431-292E20A19045}"/>
+                <a16:creationId xmlns:a16="http://schemas.microsoft.com/office/drawing/2014/main" id="{A6006919-717A-4081-AD85-2940DBAC548C}"/>
               </a:ext>
             </a:extLst>
           </p:cNvPr>
@@ -5673,7 +5673,7 @@
           <p:cNvPr id="3" name="">
             <a:extLst xmlns:a="http://schemas.openxmlformats.org/drawingml/2006/main">
               <a:ext uri="{FF2B5EF4-FFF2-40B4-BE49-F238E27FC236}">
-                <a16:creationId xmlns:a16="http://schemas.microsoft.com/office/drawing/2014/main" id="{88E073F3-ED6E-4EEF-AF7F-883E30272483}"/>
+                <a16:creationId xmlns:a16="http://schemas.microsoft.com/office/drawing/2014/main" id="{4A0D9574-2BDC-479E-8BDD-C2ECDF5B04E6}"/>
               </a:ext>
             </a:extLst>
           </p:cNvPr>
@@ -5705,7 +5705,7 @@
           <p:cNvPr id="4" name="">
             <a:extLst xmlns:a="http://schemas.openxmlformats.org/drawingml/2006/main">
               <a:ext uri="{FF2B5EF4-FFF2-40B4-BE49-F238E27FC236}">
-                <a16:creationId xmlns:a16="http://schemas.microsoft.com/office/drawing/2014/main" id="{971DA6AE-B387-4F27-9C5D-81F5FDFDF5F2}"/>
+                <a16:creationId xmlns:a16="http://schemas.microsoft.com/office/drawing/2014/main" id="{A9F4A677-41AC-40E6-8904-EFDBCFD2F1F1}"/>
               </a:ext>
             </a:extLst>
           </p:cNvPr>
@@ -5762,7 +5762,7 @@
           <p:cNvPr id="5" name="">
             <a:extLst xmlns:a="http://schemas.openxmlformats.org/drawingml/2006/main">
               <a:ext uri="{FF2B5EF4-FFF2-40B4-BE49-F238E27FC236}">
-                <a16:creationId xmlns:a16="http://schemas.microsoft.com/office/drawing/2014/main" id="{C6BF5C61-58F5-4C5D-84A3-66020512A286}"/>
+                <a16:creationId xmlns:a16="http://schemas.microsoft.com/office/drawing/2014/main" id="{B94D5570-4F9E-4631-B2C9-EB1BB3F2632C}"/>
               </a:ext>
             </a:extLst>
           </p:cNvPr>
@@ -5819,7 +5819,7 @@
           <p:cNvPr id="6" name="">
             <a:extLst xmlns:a="http://schemas.openxmlformats.org/drawingml/2006/main">
               <a:ext uri="{FF2B5EF4-FFF2-40B4-BE49-F238E27FC236}">
-                <a16:creationId xmlns:a16="http://schemas.microsoft.com/office/drawing/2014/main" id="{83DD36FF-1B1A-4321-B4F8-88F06ACF901F}"/>
+                <a16:creationId xmlns:a16="http://schemas.microsoft.com/office/drawing/2014/main" id="{80685531-2712-4A91-A95A-BFDB7E985774}"/>
               </a:ext>
             </a:extLst>
           </p:cNvPr>
@@ -5876,7 +5876,7 @@
           <p:cNvPr id="7" name="">
             <a:extLst xmlns:a="http://schemas.openxmlformats.org/drawingml/2006/main">
               <a:ext uri="{FF2B5EF4-FFF2-40B4-BE49-F238E27FC236}">
-                <a16:creationId xmlns:a16="http://schemas.microsoft.com/office/drawing/2014/main" id="{DF6309A2-5DBA-46AC-AF12-45EBF573A0B6}"/>
+                <a16:creationId xmlns:a16="http://schemas.microsoft.com/office/drawing/2014/main" id="{CB1E65F3-1E63-4CEF-8C76-6B44D76AA952}"/>
               </a:ext>
             </a:extLst>
           </p:cNvPr>
@@ -5908,7 +5908,7 @@
           <p:cNvPr id="8" name="">
             <a:extLst xmlns:a="http://schemas.openxmlformats.org/drawingml/2006/main">
               <a:ext uri="{FF2B5EF4-FFF2-40B4-BE49-F238E27FC236}">
-                <a16:creationId xmlns:a16="http://schemas.microsoft.com/office/drawing/2014/main" id="{33712CD4-6A13-40E3-BDC9-EFF5E761B270}"/>
+                <a16:creationId xmlns:a16="http://schemas.microsoft.com/office/drawing/2014/main" id="{DFED6329-C19B-49EA-BA03-20C205F843CF}"/>
               </a:ext>
             </a:extLst>
           </p:cNvPr>
@@ -5965,7 +5965,7 @@
           <p:cNvPr id="9" name="">
             <a:extLst xmlns:a="http://schemas.openxmlformats.org/drawingml/2006/main">
               <a:ext uri="{FF2B5EF4-FFF2-40B4-BE49-F238E27FC236}">
-                <a16:creationId xmlns:a16="http://schemas.microsoft.com/office/drawing/2014/main" id="{523CFE64-A6F6-44BF-8576-6679B963DA94}"/>
+                <a16:creationId xmlns:a16="http://schemas.microsoft.com/office/drawing/2014/main" id="{A57BEA29-3C4B-4DDD-82B3-4CC26CA93306}"/>
               </a:ext>
             </a:extLst>
           </p:cNvPr>
@@ -6022,7 +6022,7 @@
           <p:cNvPr id="10" name="">
             <a:extLst xmlns:a="http://schemas.openxmlformats.org/drawingml/2006/main">
               <a:ext uri="{FF2B5EF4-FFF2-40B4-BE49-F238E27FC236}">
-                <a16:creationId xmlns:a16="http://schemas.microsoft.com/office/drawing/2014/main" id="{4B406BC9-7353-4078-A4D6-7C2718DE146D}"/>
+                <a16:creationId xmlns:a16="http://schemas.microsoft.com/office/drawing/2014/main" id="{E5742E4D-3CE2-4C4C-B267-C0E4528CB5FD}"/>
               </a:ext>
             </a:extLst>
           </p:cNvPr>
@@ -6056,7 +6056,7 @@
           <p:cNvPr id="11" name="">
             <a:extLst xmlns:a="http://schemas.openxmlformats.org/drawingml/2006/main">
               <a:ext uri="{FF2B5EF4-FFF2-40B4-BE49-F238E27FC236}">
-                <a16:creationId xmlns:a16="http://schemas.microsoft.com/office/drawing/2014/main" id="{B87E7084-13BC-414F-90F7-3A45D0FE4676}"/>
+                <a16:creationId xmlns:a16="http://schemas.microsoft.com/office/drawing/2014/main" id="{9ECE4B1A-0BF2-43D3-816E-04D085C20138}"/>
               </a:ext>
             </a:extLst>
           </p:cNvPr>
@@ -6088,7 +6088,7 @@
           <p:cNvPr id="12" name="">
             <a:extLst xmlns:a="http://schemas.openxmlformats.org/drawingml/2006/main">
               <a:ext uri="{FF2B5EF4-FFF2-40B4-BE49-F238E27FC236}">
-                <a16:creationId xmlns:a16="http://schemas.microsoft.com/office/drawing/2014/main" id="{AD736DEF-18FC-4A6F-9600-A52E99844A10}"/>
+                <a16:creationId xmlns:a16="http://schemas.microsoft.com/office/drawing/2014/main" id="{08A05FBE-4B56-4095-B5C9-3C3129584D89}"/>
               </a:ext>
             </a:extLst>
           </p:cNvPr>
@@ -6145,7 +6145,7 @@
           <p:cNvPr id="13" name="">
             <a:extLst xmlns:a="http://schemas.openxmlformats.org/drawingml/2006/main">
               <a:ext uri="{FF2B5EF4-FFF2-40B4-BE49-F238E27FC236}">
-                <a16:creationId xmlns:a16="http://schemas.microsoft.com/office/drawing/2014/main" id="{BE6F217B-8E5F-4D0E-9EF3-4DCDC2CDE887}"/>
+                <a16:creationId xmlns:a16="http://schemas.microsoft.com/office/drawing/2014/main" id="{2899CAE4-C253-469D-8B53-2C520072DE56}"/>
               </a:ext>
             </a:extLst>
           </p:cNvPr>
@@ -6202,7 +6202,7 @@
           <p:cNvPr id="14" name="">
             <a:extLst xmlns:a="http://schemas.openxmlformats.org/drawingml/2006/main">
               <a:ext uri="{FF2B5EF4-FFF2-40B4-BE49-F238E27FC236}">
-                <a16:creationId xmlns:a16="http://schemas.microsoft.com/office/drawing/2014/main" id="{0634CF1A-D24D-4FE9-B6E9-BB088FF0E6C9}"/>
+                <a16:creationId xmlns:a16="http://schemas.microsoft.com/office/drawing/2014/main" id="{0FD580A7-745C-4AC1-B05C-72C2DA6D97AC}"/>
               </a:ext>
             </a:extLst>
           </p:cNvPr>
@@ -6236,7 +6236,7 @@
           <p:cNvPr id="15" name="">
             <a:extLst xmlns:a="http://schemas.openxmlformats.org/drawingml/2006/main">
               <a:ext uri="{FF2B5EF4-FFF2-40B4-BE49-F238E27FC236}">
-                <a16:creationId xmlns:a16="http://schemas.microsoft.com/office/drawing/2014/main" id="{995D070A-B1C5-411A-9847-B74C6B43724C}"/>
+                <a16:creationId xmlns:a16="http://schemas.microsoft.com/office/drawing/2014/main" id="{16B5AFB9-F649-4DF7-BC26-A5894A2ABF5C}"/>
               </a:ext>
             </a:extLst>
           </p:cNvPr>
@@ -6268,7 +6268,7 @@
           <p:cNvPr id="16" name="">
             <a:extLst xmlns:a="http://schemas.openxmlformats.org/drawingml/2006/main">
               <a:ext uri="{FF2B5EF4-FFF2-40B4-BE49-F238E27FC236}">
-                <a16:creationId xmlns:a16="http://schemas.microsoft.com/office/drawing/2014/main" id="{98389041-1C26-4DB4-90B6-FEC026696A3E}"/>
+                <a16:creationId xmlns:a16="http://schemas.microsoft.com/office/drawing/2014/main" id="{D7405DC8-9B57-41BC-8323-5A7D01845605}"/>
               </a:ext>
             </a:extLst>
           </p:cNvPr>
@@ -6325,7 +6325,7 @@
           <p:cNvPr id="17" name="">
             <a:extLst xmlns:a="http://schemas.openxmlformats.org/drawingml/2006/main">
               <a:ext uri="{FF2B5EF4-FFF2-40B4-BE49-F238E27FC236}">
-                <a16:creationId xmlns:a16="http://schemas.microsoft.com/office/drawing/2014/main" id="{1495E31A-D860-4D99-B4F5-18949F723D34}"/>
+                <a16:creationId xmlns:a16="http://schemas.microsoft.com/office/drawing/2014/main" id="{850437EB-26B8-4F5B-B320-036966BA2F90}"/>
               </a:ext>
             </a:extLst>
           </p:cNvPr>
@@ -6382,7 +6382,7 @@
           <p:cNvPr id="18" name="">
             <a:extLst xmlns:a="http://schemas.openxmlformats.org/drawingml/2006/main">
               <a:ext uri="{FF2B5EF4-FFF2-40B4-BE49-F238E27FC236}">
-                <a16:creationId xmlns:a16="http://schemas.microsoft.com/office/drawing/2014/main" id="{18BE71FA-5147-4020-8176-D5E2786BB087}"/>
+                <a16:creationId xmlns:a16="http://schemas.microsoft.com/office/drawing/2014/main" id="{FAD0398B-8B0E-4A7F-ADE6-4086DB27DD2F}"/>
               </a:ext>
             </a:extLst>
           </p:cNvPr>
@@ -6416,7 +6416,7 @@
           <p:cNvPr id="19" name="">
             <a:extLst xmlns:a="http://schemas.openxmlformats.org/drawingml/2006/main">
               <a:ext uri="{FF2B5EF4-FFF2-40B4-BE49-F238E27FC236}">
-                <a16:creationId xmlns:a16="http://schemas.microsoft.com/office/drawing/2014/main" id="{C189453D-E53F-45F4-9149-390296CBFAD3}"/>
+                <a16:creationId xmlns:a16="http://schemas.microsoft.com/office/drawing/2014/main" id="{2CBE1FAF-E2F9-44DD-89E9-573A17596F77}"/>
               </a:ext>
             </a:extLst>
           </p:cNvPr>
@@ -6448,7 +6448,7 @@
           <p:cNvPr id="20" name="">
             <a:extLst xmlns:a="http://schemas.openxmlformats.org/drawingml/2006/main">
               <a:ext uri="{FF2B5EF4-FFF2-40B4-BE49-F238E27FC236}">
-                <a16:creationId xmlns:a16="http://schemas.microsoft.com/office/drawing/2014/main" id="{537C60DD-48B3-404C-ABB1-73CFD0AED172}"/>
+                <a16:creationId xmlns:a16="http://schemas.microsoft.com/office/drawing/2014/main" id="{4E2A3256-7F57-4180-8AA4-7FEFBFBDD036}"/>
               </a:ext>
             </a:extLst>
           </p:cNvPr>
@@ -6505,7 +6505,7 @@
           <p:cNvPr id="21" name="">
             <a:extLst xmlns:a="http://schemas.openxmlformats.org/drawingml/2006/main">
               <a:ext uri="{FF2B5EF4-FFF2-40B4-BE49-F238E27FC236}">
-                <a16:creationId xmlns:a16="http://schemas.microsoft.com/office/drawing/2014/main" id="{8CFA2F28-3B7B-4629-99C0-038F5E077CC9}"/>
+                <a16:creationId xmlns:a16="http://schemas.microsoft.com/office/drawing/2014/main" id="{9D1CD06E-6FBB-4488-A516-ED142F0B6001}"/>
               </a:ext>
             </a:extLst>
           </p:cNvPr>
@@ -6562,7 +6562,7 @@
           <p:cNvPr id="22" name="">
             <a:extLst xmlns:a="http://schemas.openxmlformats.org/drawingml/2006/main">
               <a:ext uri="{FF2B5EF4-FFF2-40B4-BE49-F238E27FC236}">
-                <a16:creationId xmlns:a16="http://schemas.microsoft.com/office/drawing/2014/main" id="{34EBF96C-18D1-4096-8ABA-E732F031A38C}"/>
+                <a16:creationId xmlns:a16="http://schemas.microsoft.com/office/drawing/2014/main" id="{86481736-110F-40DC-BA40-206BB803182F}"/>
               </a:ext>
             </a:extLst>
           </p:cNvPr>
@@ -6617,7 +6617,7 @@
     </p:spTree>
     <p:extLst>
       <p:ext uri="{BB962C8B-B14F-4D97-AF65-F5344CB8AC3E}">
-        <p14:creationId xmlns:p14="http://schemas.microsoft.com/office/powerpoint/2010/main" val="1763931322"/>
+        <p14:creationId xmlns:p14="http://schemas.microsoft.com/office/powerpoint/2010/main" val="211996382"/>
       </p:ext>
     </p:extLst>
   </p:cSld>
@@ -6818,7 +6818,7 @@
           <p:cNvPr id="16" name="">
             <a:extLst xmlns:a="http://schemas.openxmlformats.org/drawingml/2006/main">
               <a:ext uri="{FF2B5EF4-FFF2-40B4-BE49-F238E27FC236}">
-                <a16:creationId xmlns:a16="http://schemas.microsoft.com/office/drawing/2014/main" id="{10F98808-17C8-4ADA-A858-815AF32AF8D5}"/>
+                <a16:creationId xmlns:a16="http://schemas.microsoft.com/office/drawing/2014/main" id="{8D55AE9E-778E-41CE-BEEB-F336C21ACA58}"/>
               </a:ext>
             </a:extLst>
           </p:cNvPr>
@@ -6850,7 +6850,7 @@
           <p:cNvPr id="2" name="">
             <a:extLst xmlns:a="http://schemas.openxmlformats.org/drawingml/2006/main">
               <a:ext uri="{FF2B5EF4-FFF2-40B4-BE49-F238E27FC236}">
-                <a16:creationId xmlns:a16="http://schemas.microsoft.com/office/drawing/2014/main" id="{2F650A89-82B5-4CA8-86E0-733D410DB197}"/>
+                <a16:creationId xmlns:a16="http://schemas.microsoft.com/office/drawing/2014/main" id="{D3E9E07F-C4B6-4165-977D-790BACBBD8DD}"/>
               </a:ext>
             </a:extLst>
           </p:cNvPr>
@@ -6907,7 +6907,7 @@
           <p:cNvPr id="3" name="">
             <a:extLst xmlns:a="http://schemas.openxmlformats.org/drawingml/2006/main">
               <a:ext uri="{FF2B5EF4-FFF2-40B4-BE49-F238E27FC236}">
-                <a16:creationId xmlns:a16="http://schemas.microsoft.com/office/drawing/2014/main" id="{210C5518-1C91-4B56-80CD-90312C2A9296}"/>
+                <a16:creationId xmlns:a16="http://schemas.microsoft.com/office/drawing/2014/main" id="{A0F997AA-8D7A-42F1-9E97-FD0CB4E5D135}"/>
               </a:ext>
             </a:extLst>
           </p:cNvPr>
@@ -6939,7 +6939,7 @@
           <p:cNvPr id="4" name="">
             <a:extLst xmlns:a="http://schemas.openxmlformats.org/drawingml/2006/main">
               <a:ext uri="{FF2B5EF4-FFF2-40B4-BE49-F238E27FC236}">
-                <a16:creationId xmlns:a16="http://schemas.microsoft.com/office/drawing/2014/main" id="{D1B09709-8331-4293-822A-C1697DA738B9}"/>
+                <a16:creationId xmlns:a16="http://schemas.microsoft.com/office/drawing/2014/main" id="{99082194-3C07-4EE8-B4A5-93933F94D6B1}"/>
               </a:ext>
             </a:extLst>
           </p:cNvPr>
@@ -6996,7 +6996,7 @@
           <p:cNvPr id="5" name="">
             <a:extLst xmlns:a="http://schemas.openxmlformats.org/drawingml/2006/main">
               <a:ext uri="{FF2B5EF4-FFF2-40B4-BE49-F238E27FC236}">
-                <a16:creationId xmlns:a16="http://schemas.microsoft.com/office/drawing/2014/main" id="{8D9134CE-F06D-4434-AAF8-C7EF8674AABA}"/>
+                <a16:creationId xmlns:a16="http://schemas.microsoft.com/office/drawing/2014/main" id="{7B7784E0-105C-4E25-B7D3-0A55A8DA2385}"/>
               </a:ext>
             </a:extLst>
           </p:cNvPr>
@@ -7053,7 +7053,7 @@
           <p:cNvPr id="6" name="">
             <a:extLst xmlns:a="http://schemas.openxmlformats.org/drawingml/2006/main">
               <a:ext uri="{FF2B5EF4-FFF2-40B4-BE49-F238E27FC236}">
-                <a16:creationId xmlns:a16="http://schemas.microsoft.com/office/drawing/2014/main" id="{AB8E3003-E6BE-48F7-BF9D-8865FD8FB522}"/>
+                <a16:creationId xmlns:a16="http://schemas.microsoft.com/office/drawing/2014/main" id="{C4475F16-5D6E-41D0-A786-1FAED7F6EB36}"/>
               </a:ext>
             </a:extLst>
           </p:cNvPr>
@@ -7110,7 +7110,7 @@
           <p:cNvPr id="7" name="">
             <a:extLst xmlns:a="http://schemas.openxmlformats.org/drawingml/2006/main">
               <a:ext uri="{FF2B5EF4-FFF2-40B4-BE49-F238E27FC236}">
-                <a16:creationId xmlns:a16="http://schemas.microsoft.com/office/drawing/2014/main" id="{6F110602-74FE-4CE8-9BEA-D708EE7E6C92}"/>
+                <a16:creationId xmlns:a16="http://schemas.microsoft.com/office/drawing/2014/main" id="{6A53BD0A-41D0-4B74-8495-98B589DC3608}"/>
               </a:ext>
             </a:extLst>
           </p:cNvPr>
@@ -7142,7 +7142,7 @@
           <p:cNvPr id="8" name="">
             <a:extLst xmlns:a="http://schemas.openxmlformats.org/drawingml/2006/main">
               <a:ext uri="{FF2B5EF4-FFF2-40B4-BE49-F238E27FC236}">
-                <a16:creationId xmlns:a16="http://schemas.microsoft.com/office/drawing/2014/main" id="{2FAA4B2F-8C59-4660-88AE-D2EACDAFF07F}"/>
+                <a16:creationId xmlns:a16="http://schemas.microsoft.com/office/drawing/2014/main" id="{E4D44231-B0E1-448B-944C-02A14BA39919}"/>
               </a:ext>
             </a:extLst>
           </p:cNvPr>
@@ -7199,7 +7199,7 @@
           <p:cNvPr id="9" name="">
             <a:extLst xmlns:a="http://schemas.openxmlformats.org/drawingml/2006/main">
               <a:ext uri="{FF2B5EF4-FFF2-40B4-BE49-F238E27FC236}">
-                <a16:creationId xmlns:a16="http://schemas.microsoft.com/office/drawing/2014/main" id="{ABC920DD-413C-46AB-915E-811588EC2223}"/>
+                <a16:creationId xmlns:a16="http://schemas.microsoft.com/office/drawing/2014/main" id="{114D4FA8-7612-4E88-BF63-8CE689516997}"/>
               </a:ext>
             </a:extLst>
           </p:cNvPr>
@@ -7256,7 +7256,7 @@
           <p:cNvPr id="10" name="">
             <a:extLst xmlns:a="http://schemas.openxmlformats.org/drawingml/2006/main">
               <a:ext uri="{FF2B5EF4-FFF2-40B4-BE49-F238E27FC236}">
-                <a16:creationId xmlns:a16="http://schemas.microsoft.com/office/drawing/2014/main" id="{CFA3A951-D668-44CE-8535-54DE445A8AB8}"/>
+                <a16:creationId xmlns:a16="http://schemas.microsoft.com/office/drawing/2014/main" id="{8247C2BC-8E80-4BEA-82F0-8AFC1FA6636F}"/>
               </a:ext>
             </a:extLst>
           </p:cNvPr>
@@ -7313,7 +7313,7 @@
           <p:cNvPr id="11" name="">
             <a:extLst xmlns:a="http://schemas.openxmlformats.org/drawingml/2006/main">
               <a:ext uri="{FF2B5EF4-FFF2-40B4-BE49-F238E27FC236}">
-                <a16:creationId xmlns:a16="http://schemas.microsoft.com/office/drawing/2014/main" id="{DE22F9E9-6319-4709-A1F7-1B61D761717F}"/>
+                <a16:creationId xmlns:a16="http://schemas.microsoft.com/office/drawing/2014/main" id="{5FF46004-301C-4B71-990F-36D4A05AE5FC}"/>
               </a:ext>
             </a:extLst>
           </p:cNvPr>
@@ -7345,7 +7345,7 @@
           <p:cNvPr id="12" name="">
             <a:extLst xmlns:a="http://schemas.openxmlformats.org/drawingml/2006/main">
               <a:ext uri="{FF2B5EF4-FFF2-40B4-BE49-F238E27FC236}">
-                <a16:creationId xmlns:a16="http://schemas.microsoft.com/office/drawing/2014/main" id="{937F650C-8B99-419D-A5B8-C0385F116C2A}"/>
+                <a16:creationId xmlns:a16="http://schemas.microsoft.com/office/drawing/2014/main" id="{A548F7B3-3614-415E-B326-ECD1606F8F7D}"/>
               </a:ext>
             </a:extLst>
           </p:cNvPr>
@@ -7402,7 +7402,7 @@
           <p:cNvPr id="13" name="">
             <a:extLst xmlns:a="http://schemas.openxmlformats.org/drawingml/2006/main">
               <a:ext uri="{FF2B5EF4-FFF2-40B4-BE49-F238E27FC236}">
-                <a16:creationId xmlns:a16="http://schemas.microsoft.com/office/drawing/2014/main" id="{F52BF6EA-4511-484B-9889-F686272C757D}"/>
+                <a16:creationId xmlns:a16="http://schemas.microsoft.com/office/drawing/2014/main" id="{22C24353-7699-476E-9B56-CFE4B4672265}"/>
               </a:ext>
             </a:extLst>
           </p:cNvPr>
@@ -7459,7 +7459,7 @@
           <p:cNvPr id="14" name="">
             <a:extLst xmlns:a="http://schemas.openxmlformats.org/drawingml/2006/main">
               <a:ext uri="{FF2B5EF4-FFF2-40B4-BE49-F238E27FC236}">
-                <a16:creationId xmlns:a16="http://schemas.microsoft.com/office/drawing/2014/main" id="{85CFD01D-FADA-4A2E-A797-263ACFA57048}"/>
+                <a16:creationId xmlns:a16="http://schemas.microsoft.com/office/drawing/2014/main" id="{E2C9EECA-C833-4410-AD89-DCD9E7AB3E38}"/>
               </a:ext>
             </a:extLst>
           </p:cNvPr>
@@ -7516,7 +7516,7 @@
           <p:cNvPr id="15" name="">
             <a:extLst xmlns:a="http://schemas.openxmlformats.org/drawingml/2006/main">
               <a:ext uri="{FF2B5EF4-FFF2-40B4-BE49-F238E27FC236}">
-                <a16:creationId xmlns:a16="http://schemas.microsoft.com/office/drawing/2014/main" id="{08649A1F-56BC-48BA-BA95-5BFE8A534D6C}"/>
+                <a16:creationId xmlns:a16="http://schemas.microsoft.com/office/drawing/2014/main" id="{C44474F0-23A8-42EE-9E65-8ED6FB452C44}"/>
               </a:ext>
             </a:extLst>
           </p:cNvPr>
@@ -7571,7 +7571,7 @@
     </p:spTree>
     <p:extLst>
       <p:ext uri="{BB962C8B-B14F-4D97-AF65-F5344CB8AC3E}">
-        <p14:creationId xmlns:p14="http://schemas.microsoft.com/office/powerpoint/2010/main" val="194443040"/>
+        <p14:creationId xmlns:p14="http://schemas.microsoft.com/office/powerpoint/2010/main" val="1621430574"/>
       </p:ext>
     </p:extLst>
   </p:cSld>
@@ -7772,7 +7772,7 @@
           <p:cNvPr id="23" name="">
             <a:extLst xmlns:a="http://schemas.openxmlformats.org/drawingml/2006/main">
               <a:ext uri="{FF2B5EF4-FFF2-40B4-BE49-F238E27FC236}">
-                <a16:creationId xmlns:a16="http://schemas.microsoft.com/office/drawing/2014/main" id="{B03884D5-EFB5-4D76-94E3-106DDF430981}"/>
+                <a16:creationId xmlns:a16="http://schemas.microsoft.com/office/drawing/2014/main" id="{42787CBF-B795-4881-B50D-9FB20D5B42C9}"/>
               </a:ext>
             </a:extLst>
           </p:cNvPr>
@@ -7804,7 +7804,7 @@
           <p:cNvPr id="2" name="">
             <a:extLst xmlns:a="http://schemas.openxmlformats.org/drawingml/2006/main">
               <a:ext uri="{FF2B5EF4-FFF2-40B4-BE49-F238E27FC236}">
-                <a16:creationId xmlns:a16="http://schemas.microsoft.com/office/drawing/2014/main" id="{14F35F13-9D61-453A-850C-05EEBB66D394}"/>
+                <a16:creationId xmlns:a16="http://schemas.microsoft.com/office/drawing/2014/main" id="{DB6F6FC2-5E55-416C-9AC9-A883B26995E7}"/>
               </a:ext>
             </a:extLst>
           </p:cNvPr>
@@ -7861,7 +7861,7 @@
           <p:cNvPr id="3" name="">
             <a:extLst xmlns:a="http://schemas.openxmlformats.org/drawingml/2006/main">
               <a:ext uri="{FF2B5EF4-FFF2-40B4-BE49-F238E27FC236}">
-                <a16:creationId xmlns:a16="http://schemas.microsoft.com/office/drawing/2014/main" id="{427859F2-5040-43BB-BCCF-90A093FDDE05}"/>
+                <a16:creationId xmlns:a16="http://schemas.microsoft.com/office/drawing/2014/main" id="{83483616-EBBE-4306-8833-45D7C4AE72AD}"/>
               </a:ext>
             </a:extLst>
           </p:cNvPr>
@@ -7893,7 +7893,7 @@
           <p:cNvPr id="4" name="">
             <a:extLst xmlns:a="http://schemas.openxmlformats.org/drawingml/2006/main">
               <a:ext uri="{FF2B5EF4-FFF2-40B4-BE49-F238E27FC236}">
-                <a16:creationId xmlns:a16="http://schemas.microsoft.com/office/drawing/2014/main" id="{F1C93719-D3F5-4452-BFC7-D2CEE99EAAF9}"/>
+                <a16:creationId xmlns:a16="http://schemas.microsoft.com/office/drawing/2014/main" id="{82B81CB4-C5D2-4E8B-BA8A-5360C0F0C41E}"/>
               </a:ext>
             </a:extLst>
           </p:cNvPr>
@@ -7950,7 +7950,7 @@
           <p:cNvPr id="5" name="">
             <a:extLst xmlns:a="http://schemas.openxmlformats.org/drawingml/2006/main">
               <a:ext uri="{FF2B5EF4-FFF2-40B4-BE49-F238E27FC236}">
-                <a16:creationId xmlns:a16="http://schemas.microsoft.com/office/drawing/2014/main" id="{8A353644-ACEF-48F7-88DE-0CC08CDC3AB7}"/>
+                <a16:creationId xmlns:a16="http://schemas.microsoft.com/office/drawing/2014/main" id="{1055B03C-26CF-4E50-BC3B-AA7D3C8B51C5}"/>
               </a:ext>
             </a:extLst>
           </p:cNvPr>
@@ -8007,7 +8007,7 @@
           <p:cNvPr id="6" name="">
             <a:extLst xmlns:a="http://schemas.openxmlformats.org/drawingml/2006/main">
               <a:ext uri="{FF2B5EF4-FFF2-40B4-BE49-F238E27FC236}">
-                <a16:creationId xmlns:a16="http://schemas.microsoft.com/office/drawing/2014/main" id="{B429EED2-F439-48BB-AA92-628A7275CEBD}"/>
+                <a16:creationId xmlns:a16="http://schemas.microsoft.com/office/drawing/2014/main" id="{47B0928B-835F-4A8C-B223-C0D57A35DF22}"/>
               </a:ext>
             </a:extLst>
           </p:cNvPr>
@@ -8064,7 +8064,7 @@
           <p:cNvPr id="7" name="">
             <a:extLst xmlns:a="http://schemas.openxmlformats.org/drawingml/2006/main">
               <a:ext uri="{FF2B5EF4-FFF2-40B4-BE49-F238E27FC236}">
-                <a16:creationId xmlns:a16="http://schemas.microsoft.com/office/drawing/2014/main" id="{9DEB887C-8E04-4396-9B08-934F18982294}"/>
+                <a16:creationId xmlns:a16="http://schemas.microsoft.com/office/drawing/2014/main" id="{2FF349C4-EC7F-42B0-A097-BC2E9B52660D}"/>
               </a:ext>
             </a:extLst>
           </p:cNvPr>
@@ -8096,7 +8096,7 @@
           <p:cNvPr id="8" name="">
             <a:extLst xmlns:a="http://schemas.openxmlformats.org/drawingml/2006/main">
               <a:ext uri="{FF2B5EF4-FFF2-40B4-BE49-F238E27FC236}">
-                <a16:creationId xmlns:a16="http://schemas.microsoft.com/office/drawing/2014/main" id="{A844ED1D-3042-437C-BF52-FC52B11805D6}"/>
+                <a16:creationId xmlns:a16="http://schemas.microsoft.com/office/drawing/2014/main" id="{4A0E4D2E-DFD1-4919-8318-96004C07EE45}"/>
               </a:ext>
             </a:extLst>
           </p:cNvPr>
@@ -8153,7 +8153,7 @@
           <p:cNvPr id="9" name="">
             <a:extLst xmlns:a="http://schemas.openxmlformats.org/drawingml/2006/main">
               <a:ext uri="{FF2B5EF4-FFF2-40B4-BE49-F238E27FC236}">
-                <a16:creationId xmlns:a16="http://schemas.microsoft.com/office/drawing/2014/main" id="{C4656E6F-93CF-4C46-9852-7B6B0188BA20}"/>
+                <a16:creationId xmlns:a16="http://schemas.microsoft.com/office/drawing/2014/main" id="{312571AA-4D05-4F2A-9D06-A0BD0FA2ABA1}"/>
               </a:ext>
             </a:extLst>
           </p:cNvPr>
@@ -8210,19 +8210,19 @@
           <p:cNvPr id="10" name="">
             <a:extLst xmlns:a="http://schemas.openxmlformats.org/drawingml/2006/main">
               <a:ext uri="{FF2B5EF4-FFF2-40B4-BE49-F238E27FC236}">
-                <a16:creationId xmlns:a16="http://schemas.microsoft.com/office/drawing/2014/main" id="{189675BD-55C7-4F69-9414-E1857BFC51D2}"/>
-              </a:ext>
-            </a:extLst>
-          </p:cNvPr>
-          <p:cNvSpPr>
-            <a:spLocks xmlns:a="http://schemas.openxmlformats.org/drawingml/2006/main" noGrp="1"/>
-          </p:cNvSpPr>
-          <p:nvPr/>
-        </p:nvSpPr>
-        <p:spPr>
-          <a:xfrm xmlns:a="http://schemas.openxmlformats.org/drawingml/2006/main">
-            <a:off x="914400" y="1257300"/>
-            <a:ext cx="10363200" cy="781050"/>
+                <a16:creationId xmlns:a16="http://schemas.microsoft.com/office/drawing/2014/main" id="{3C06C50D-0D54-450F-8AD1-1CC28AF471BA}"/>
+              </a:ext>
+            </a:extLst>
+          </p:cNvPr>
+          <p:cNvSpPr>
+            <a:spLocks xmlns:a="http://schemas.openxmlformats.org/drawingml/2006/main" noGrp="1"/>
+          </p:cNvSpPr>
+          <p:nvPr/>
+        </p:nvSpPr>
+        <p:spPr>
+          <a:xfrm xmlns:a="http://schemas.openxmlformats.org/drawingml/2006/main">
+            <a:off x="857250" y="1219200"/>
+            <a:ext cx="10477500" cy="742950"/>
           </a:xfrm>
           <a:prstGeom xmlns:a="http://schemas.openxmlformats.org/drawingml/2006/main" prst="rect">
             <a:avLst/>
@@ -8239,7 +8239,7 @@
           <a:lstStyle xmlns:a="http://schemas.openxmlformats.org/drawingml/2006/main"/>
           <a:p xmlns:a="http://schemas.openxmlformats.org/drawingml/2006/main">
             <a:pPr algn="ctr">
-              <a:defRPr sz="2175" b="1">
+              <a:defRPr sz="2100" b="1">
                 <a:solidFill>
                   <a:srgbClr val="17253A"/>
                 </a:solidFill>
@@ -8249,7 +8249,7 @@
               </a:defRPr>
             </a:pPr>
             <a:r>
-              <a:rPr sz="2175" b="1">
+              <a:rPr sz="2100" b="1">
                 <a:solidFill>
                   <a:srgbClr val="17253A"/>
                 </a:solidFill>
@@ -8267,28 +8267,30 @@
           <p:cNvPr id="11" name="">
             <a:extLst xmlns:a="http://schemas.openxmlformats.org/drawingml/2006/main">
               <a:ext uri="{FF2B5EF4-FFF2-40B4-BE49-F238E27FC236}">
-                <a16:creationId xmlns:a16="http://schemas.microsoft.com/office/drawing/2014/main" id="{C6E7951B-46CC-4567-B012-48469FB06C1D}"/>
-              </a:ext>
-            </a:extLst>
-          </p:cNvPr>
-          <p:cNvSpPr>
-            <a:spLocks xmlns:a="http://schemas.openxmlformats.org/drawingml/2006/main" noGrp="1"/>
-          </p:cNvSpPr>
-          <p:nvPr/>
-        </p:nvSpPr>
-        <p:spPr>
-          <a:xfrm xmlns:a="http://schemas.openxmlformats.org/drawingml/2006/main">
-            <a:off x="1000125" y="2247900"/>
-            <a:ext cx="476250" cy="476250"/>
-          </a:xfrm>
-          <a:prstGeom xmlns:a="http://schemas.openxmlformats.org/drawingml/2006/main" prst="ellipse">
+                <a16:creationId xmlns:a16="http://schemas.microsoft.com/office/drawing/2014/main" id="{64429F01-8331-4152-A1A4-E084EF68A23C}"/>
+              </a:ext>
+            </a:extLst>
+          </p:cNvPr>
+          <p:cNvSpPr>
+            <a:spLocks xmlns:a="http://schemas.openxmlformats.org/drawingml/2006/main" noGrp="1"/>
+          </p:cNvSpPr>
+          <p:nvPr/>
+        </p:nvSpPr>
+        <p:spPr>
+          <a:xfrm xmlns:a="http://schemas.openxmlformats.org/drawingml/2006/main">
+            <a:off x="971550" y="2124075"/>
+            <a:ext cx="38100" cy="3524250"/>
+          </a:xfrm>
+          <a:prstGeom xmlns:a="http://schemas.openxmlformats.org/drawingml/2006/main" prst="rect">
             <a:avLst/>
           </a:prstGeom>
           <a:solidFill xmlns:a="http://schemas.openxmlformats.org/drawingml/2006/main">
-            <a:srgbClr val="18324A"/>
+            <a:srgbClr val="2C6E73"/>
           </a:solidFill>
           <a:ln xmlns:a="http://schemas.openxmlformats.org/drawingml/2006/main" w="0">
-            <a:noFill/>
+            <a:solidFill>
+              <a:srgbClr val="2C6E73"/>
+            </a:solidFill>
           </a:ln>
         </p:spPr>
       </p:sp>
@@ -8297,19 +8299,19 @@
           <p:cNvPr id="12" name="">
             <a:extLst xmlns:a="http://schemas.openxmlformats.org/drawingml/2006/main">
               <a:ext uri="{FF2B5EF4-FFF2-40B4-BE49-F238E27FC236}">
-                <a16:creationId xmlns:a16="http://schemas.microsoft.com/office/drawing/2014/main" id="{523B58C5-7C94-49F1-8DF2-8BC073E1C9CC}"/>
-              </a:ext>
-            </a:extLst>
-          </p:cNvPr>
-          <p:cNvSpPr>
-            <a:spLocks xmlns:a="http://schemas.openxmlformats.org/drawingml/2006/main" noGrp="1"/>
-          </p:cNvSpPr>
-          <p:nvPr/>
-        </p:nvSpPr>
-        <p:spPr>
-          <a:xfrm xmlns:a="http://schemas.openxmlformats.org/drawingml/2006/main">
-            <a:off x="1000125" y="2276475"/>
-            <a:ext cx="476250" cy="419100"/>
+                <a16:creationId xmlns:a16="http://schemas.microsoft.com/office/drawing/2014/main" id="{C91A77A9-5CC5-4487-B066-507ABFE9BB59}"/>
+              </a:ext>
+            </a:extLst>
+          </p:cNvPr>
+          <p:cNvSpPr>
+            <a:spLocks xmlns:a="http://schemas.openxmlformats.org/drawingml/2006/main" noGrp="1"/>
+          </p:cNvSpPr>
+          <p:nvPr/>
+        </p:nvSpPr>
+        <p:spPr>
+          <a:xfrm xmlns:a="http://schemas.openxmlformats.org/drawingml/2006/main">
+            <a:off x="1162050" y="2200275"/>
+            <a:ext cx="400050" cy="400050"/>
           </a:xfrm>
           <a:prstGeom xmlns:a="http://schemas.openxmlformats.org/drawingml/2006/main" prst="rect">
             <a:avLst/>
@@ -8326,9 +8328,9 @@
           <a:lstStyle xmlns:a="http://schemas.openxmlformats.org/drawingml/2006/main"/>
           <a:p xmlns:a="http://schemas.openxmlformats.org/drawingml/2006/main">
             <a:pPr algn="ctr">
-              <a:defRPr sz="1350" b="1">
-                <a:solidFill>
-                  <a:srgbClr val="FFFFFF"/>
+              <a:defRPr sz="1125" b="1">
+                <a:solidFill>
+                  <a:srgbClr val="2C6E73"/>
                 </a:solidFill>
                 <a:latin typeface="Arial"/>
                 <a:ea typeface="Arial"/>
@@ -8336,9 +8338,9 @@
               </a:defRPr>
             </a:pPr>
             <a:r>
-              <a:rPr sz="1350" b="1">
-                <a:solidFill>
-                  <a:srgbClr val="FFFFFF"/>
+              <a:rPr sz="1125" b="1">
+                <a:solidFill>
+                  <a:srgbClr val="2C6E73"/>
                 </a:solidFill>
                 <a:latin typeface="Arial"/>
                 <a:ea typeface="Arial"/>
@@ -8354,19 +8356,19 @@
           <p:cNvPr id="13" name="">
             <a:extLst xmlns:a="http://schemas.openxmlformats.org/drawingml/2006/main">
               <a:ext uri="{FF2B5EF4-FFF2-40B4-BE49-F238E27FC236}">
-                <a16:creationId xmlns:a16="http://schemas.microsoft.com/office/drawing/2014/main" id="{B039EA21-5C4F-4238-A4C7-F5EA15FC3192}"/>
-              </a:ext>
-            </a:extLst>
-          </p:cNvPr>
-          <p:cNvSpPr>
-            <a:spLocks xmlns:a="http://schemas.openxmlformats.org/drawingml/2006/main" noGrp="1"/>
-          </p:cNvSpPr>
-          <p:nvPr/>
-        </p:nvSpPr>
-        <p:spPr>
-          <a:xfrm xmlns:a="http://schemas.openxmlformats.org/drawingml/2006/main">
-            <a:off x="1714500" y="2181225"/>
-            <a:ext cx="9429750" cy="609600"/>
+                <a16:creationId xmlns:a16="http://schemas.microsoft.com/office/drawing/2014/main" id="{939E4F2B-4B9C-4338-ABCF-DBA0DBD23CBA}"/>
+              </a:ext>
+            </a:extLst>
+          </p:cNvPr>
+          <p:cNvSpPr>
+            <a:spLocks xmlns:a="http://schemas.openxmlformats.org/drawingml/2006/main" noGrp="1"/>
+          </p:cNvSpPr>
+          <p:nvPr/>
+        </p:nvSpPr>
+        <p:spPr>
+          <a:xfrm xmlns:a="http://schemas.openxmlformats.org/drawingml/2006/main">
+            <a:off x="1714500" y="2114550"/>
+            <a:ext cx="9525000" cy="809625"/>
           </a:xfrm>
           <a:prstGeom xmlns:a="http://schemas.openxmlformats.org/drawingml/2006/main" prst="rect">
             <a:avLst/>
@@ -8383,7 +8385,7 @@
           <a:lstStyle xmlns:a="http://schemas.openxmlformats.org/drawingml/2006/main"/>
           <a:p xmlns:a="http://schemas.openxmlformats.org/drawingml/2006/main">
             <a:pPr algn="l">
-              <a:defRPr sz="1500" b="0">
+              <a:defRPr sz="1725" b="0">
                 <a:solidFill>
                   <a:srgbClr val="17253A"/>
                 </a:solidFill>
@@ -8393,7 +8395,7 @@
               </a:defRPr>
             </a:pPr>
             <a:r>
-              <a:rPr sz="1500" b="0">
+              <a:rPr sz="1725" b="0">
                 <a:solidFill>
                   <a:srgbClr val="17253A"/>
                 </a:solidFill>
@@ -8401,7 +8403,7 @@
                 <a:ea typeface="Arial"/>
                 <a:cs typeface="Arial"/>
               </a:rPr>
-              <a:t>Identify the structure: Underline the place named in the question.</a:t>
+              <a:t>Nearest 10,000: 8,219 ≥ 5,000 → 6,750,000</a:t>
             </a:r>
           </a:p>
         </p:txBody>
@@ -8411,28 +8413,30 @@
           <p:cNvPr id="14" name="">
             <a:extLst xmlns:a="http://schemas.openxmlformats.org/drawingml/2006/main">
               <a:ext uri="{FF2B5EF4-FFF2-40B4-BE49-F238E27FC236}">
-                <a16:creationId xmlns:a16="http://schemas.microsoft.com/office/drawing/2014/main" id="{921E04DE-662C-43AD-A10A-5D0135B304B7}"/>
-              </a:ext>
-            </a:extLst>
-          </p:cNvPr>
-          <p:cNvSpPr>
-            <a:spLocks xmlns:a="http://schemas.openxmlformats.org/drawingml/2006/main" noGrp="1"/>
-          </p:cNvSpPr>
-          <p:nvPr/>
-        </p:nvSpPr>
-        <p:spPr>
-          <a:xfrm xmlns:a="http://schemas.openxmlformats.org/drawingml/2006/main">
-            <a:off x="1000125" y="2990850"/>
-            <a:ext cx="476250" cy="476250"/>
-          </a:xfrm>
-          <a:prstGeom xmlns:a="http://schemas.openxmlformats.org/drawingml/2006/main" prst="ellipse">
+                <a16:creationId xmlns:a16="http://schemas.microsoft.com/office/drawing/2014/main" id="{12CC9A66-1396-4148-9CD8-B3A4C2104376}"/>
+              </a:ext>
+            </a:extLst>
+          </p:cNvPr>
+          <p:cNvSpPr>
+            <a:spLocks xmlns:a="http://schemas.openxmlformats.org/drawingml/2006/main" noGrp="1"/>
+          </p:cNvSpPr>
+          <p:nvPr/>
+        </p:nvSpPr>
+        <p:spPr>
+          <a:xfrm xmlns:a="http://schemas.openxmlformats.org/drawingml/2006/main">
+            <a:off x="1714500" y="2943225"/>
+            <a:ext cx="9334500" cy="9525"/>
+          </a:xfrm>
+          <a:prstGeom xmlns:a="http://schemas.openxmlformats.org/drawingml/2006/main" prst="rect">
             <a:avLst/>
           </a:prstGeom>
           <a:solidFill xmlns:a="http://schemas.openxmlformats.org/drawingml/2006/main">
-            <a:srgbClr val="2C6E73"/>
+            <a:srgbClr val="D9E0E6"/>
           </a:solidFill>
           <a:ln xmlns:a="http://schemas.openxmlformats.org/drawingml/2006/main" w="0">
-            <a:noFill/>
+            <a:solidFill>
+              <a:srgbClr val="D9E0E6"/>
+            </a:solidFill>
           </a:ln>
         </p:spPr>
       </p:sp>
@@ -8441,19 +8445,19 @@
           <p:cNvPr id="15" name="">
             <a:extLst xmlns:a="http://schemas.openxmlformats.org/drawingml/2006/main">
               <a:ext uri="{FF2B5EF4-FFF2-40B4-BE49-F238E27FC236}">
-                <a16:creationId xmlns:a16="http://schemas.microsoft.com/office/drawing/2014/main" id="{BACD36C3-52AD-4EC0-99B1-3E097E2F6A42}"/>
-              </a:ext>
-            </a:extLst>
-          </p:cNvPr>
-          <p:cNvSpPr>
-            <a:spLocks xmlns:a="http://schemas.openxmlformats.org/drawingml/2006/main" noGrp="1"/>
-          </p:cNvSpPr>
-          <p:nvPr/>
-        </p:nvSpPr>
-        <p:spPr>
-          <a:xfrm xmlns:a="http://schemas.openxmlformats.org/drawingml/2006/main">
-            <a:off x="1000125" y="3019425"/>
-            <a:ext cx="476250" cy="419100"/>
+                <a16:creationId xmlns:a16="http://schemas.microsoft.com/office/drawing/2014/main" id="{E4548AD5-1F24-4C8D-98CD-58F6A809D806}"/>
+              </a:ext>
+            </a:extLst>
+          </p:cNvPr>
+          <p:cNvSpPr>
+            <a:spLocks xmlns:a="http://schemas.openxmlformats.org/drawingml/2006/main" noGrp="1"/>
+          </p:cNvSpPr>
+          <p:nvPr/>
+        </p:nvSpPr>
+        <p:spPr>
+          <a:xfrm xmlns:a="http://schemas.openxmlformats.org/drawingml/2006/main">
+            <a:off x="1162050" y="3076575"/>
+            <a:ext cx="400050" cy="400050"/>
           </a:xfrm>
           <a:prstGeom xmlns:a="http://schemas.openxmlformats.org/drawingml/2006/main" prst="rect">
             <a:avLst/>
@@ -8470,9 +8474,9 @@
           <a:lstStyle xmlns:a="http://schemas.openxmlformats.org/drawingml/2006/main"/>
           <a:p xmlns:a="http://schemas.openxmlformats.org/drawingml/2006/main">
             <a:pPr algn="ctr">
-              <a:defRPr sz="1350" b="1">
-                <a:solidFill>
-                  <a:srgbClr val="FFFFFF"/>
+              <a:defRPr sz="1125" b="1">
+                <a:solidFill>
+                  <a:srgbClr val="2C6E73"/>
                 </a:solidFill>
                 <a:latin typeface="Arial"/>
                 <a:ea typeface="Arial"/>
@@ -8480,9 +8484,9 @@
               </a:defRPr>
             </a:pPr>
             <a:r>
-              <a:rPr sz="1350" b="1">
-                <a:solidFill>
-                  <a:srgbClr val="FFFFFF"/>
+              <a:rPr sz="1125" b="1">
+                <a:solidFill>
+                  <a:srgbClr val="2C6E73"/>
                 </a:solidFill>
                 <a:latin typeface="Arial"/>
                 <a:ea typeface="Arial"/>
@@ -8498,19 +8502,19 @@
           <p:cNvPr id="16" name="">
             <a:extLst xmlns:a="http://schemas.openxmlformats.org/drawingml/2006/main">
               <a:ext uri="{FF2B5EF4-FFF2-40B4-BE49-F238E27FC236}">
-                <a16:creationId xmlns:a16="http://schemas.microsoft.com/office/drawing/2014/main" id="{28A563A5-FB32-4921-AA71-36EDB3A42135}"/>
-              </a:ext>
-            </a:extLst>
-          </p:cNvPr>
-          <p:cNvSpPr>
-            <a:spLocks xmlns:a="http://schemas.openxmlformats.org/drawingml/2006/main" noGrp="1"/>
-          </p:cNvSpPr>
-          <p:nvPr/>
-        </p:nvSpPr>
-        <p:spPr>
-          <a:xfrm xmlns:a="http://schemas.openxmlformats.org/drawingml/2006/main">
-            <a:off x="1714500" y="2924175"/>
-            <a:ext cx="9429750" cy="609600"/>
+                <a16:creationId xmlns:a16="http://schemas.microsoft.com/office/drawing/2014/main" id="{28052E5E-0EEA-4703-B95F-9111F50E87FD}"/>
+              </a:ext>
+            </a:extLst>
+          </p:cNvPr>
+          <p:cNvSpPr>
+            <a:spLocks xmlns:a="http://schemas.openxmlformats.org/drawingml/2006/main" noGrp="1"/>
+          </p:cNvSpPr>
+          <p:nvPr/>
+        </p:nvSpPr>
+        <p:spPr>
+          <a:xfrm xmlns:a="http://schemas.openxmlformats.org/drawingml/2006/main">
+            <a:off x="1714500" y="2990850"/>
+            <a:ext cx="9525000" cy="809625"/>
           </a:xfrm>
           <a:prstGeom xmlns:a="http://schemas.openxmlformats.org/drawingml/2006/main" prst="rect">
             <a:avLst/>
@@ -8527,7 +8531,7 @@
           <a:lstStyle xmlns:a="http://schemas.openxmlformats.org/drawingml/2006/main"/>
           <a:p xmlns:a="http://schemas.openxmlformats.org/drawingml/2006/main">
             <a:pPr algn="l">
-              <a:defRPr sz="1500" b="0">
+              <a:defRPr sz="1725" b="0">
                 <a:solidFill>
                   <a:srgbClr val="17253A"/>
                 </a:solidFill>
@@ -8537,7 +8541,7 @@
               </a:defRPr>
             </a:pPr>
             <a:r>
-              <a:rPr sz="1500" b="0">
+              <a:rPr sz="1725" b="0">
                 <a:solidFill>
                   <a:srgbClr val="17253A"/>
                 </a:solidFill>
@@ -8545,7 +8549,7 @@
                 <a:ea typeface="Arial"/>
                 <a:cs typeface="Arial"/>
               </a:rPr>
-              <a:t>Set up the method: Check the digit immediately to its right or locate the two boundaries.</a:t>
+              <a:t>Nearest 100,000: 48,219 &lt; 50,000 → 6,700,000</a:t>
             </a:r>
           </a:p>
         </p:txBody>
@@ -8555,28 +8559,30 @@
           <p:cNvPr id="17" name="">
             <a:extLst xmlns:a="http://schemas.openxmlformats.org/drawingml/2006/main">
               <a:ext uri="{FF2B5EF4-FFF2-40B4-BE49-F238E27FC236}">
-                <a16:creationId xmlns:a16="http://schemas.microsoft.com/office/drawing/2014/main" id="{C0031365-57B2-430D-A2AA-6DB7A8FF58F1}"/>
-              </a:ext>
-            </a:extLst>
-          </p:cNvPr>
-          <p:cNvSpPr>
-            <a:spLocks xmlns:a="http://schemas.openxmlformats.org/drawingml/2006/main" noGrp="1"/>
-          </p:cNvSpPr>
-          <p:nvPr/>
-        </p:nvSpPr>
-        <p:spPr>
-          <a:xfrm xmlns:a="http://schemas.openxmlformats.org/drawingml/2006/main">
-            <a:off x="1000125" y="3733800"/>
-            <a:ext cx="476250" cy="476250"/>
-          </a:xfrm>
-          <a:prstGeom xmlns:a="http://schemas.openxmlformats.org/drawingml/2006/main" prst="ellipse">
+                <a16:creationId xmlns:a16="http://schemas.microsoft.com/office/drawing/2014/main" id="{97CDB201-B84C-4313-9870-15AD48B3CE2C}"/>
+              </a:ext>
+            </a:extLst>
+          </p:cNvPr>
+          <p:cNvSpPr>
+            <a:spLocks xmlns:a="http://schemas.openxmlformats.org/drawingml/2006/main" noGrp="1"/>
+          </p:cNvSpPr>
+          <p:nvPr/>
+        </p:nvSpPr>
+        <p:spPr>
+          <a:xfrm xmlns:a="http://schemas.openxmlformats.org/drawingml/2006/main">
+            <a:off x="1714500" y="3819525"/>
+            <a:ext cx="9334500" cy="9525"/>
+          </a:xfrm>
+          <a:prstGeom xmlns:a="http://schemas.openxmlformats.org/drawingml/2006/main" prst="rect">
             <a:avLst/>
           </a:prstGeom>
           <a:solidFill xmlns:a="http://schemas.openxmlformats.org/drawingml/2006/main">
-            <a:srgbClr val="2C6E73"/>
+            <a:srgbClr val="D9E0E6"/>
           </a:solidFill>
           <a:ln xmlns:a="http://schemas.openxmlformats.org/drawingml/2006/main" w="0">
-            <a:noFill/>
+            <a:solidFill>
+              <a:srgbClr val="D9E0E6"/>
+            </a:solidFill>
           </a:ln>
         </p:spPr>
       </p:sp>
@@ -8585,19 +8591,19 @@
           <p:cNvPr id="18" name="">
             <a:extLst xmlns:a="http://schemas.openxmlformats.org/drawingml/2006/main">
               <a:ext uri="{FF2B5EF4-FFF2-40B4-BE49-F238E27FC236}">
-                <a16:creationId xmlns:a16="http://schemas.microsoft.com/office/drawing/2014/main" id="{4DD9D0AD-FB06-4B05-B4DC-1A9C8F2A77AC}"/>
-              </a:ext>
-            </a:extLst>
-          </p:cNvPr>
-          <p:cNvSpPr>
-            <a:spLocks xmlns:a="http://schemas.openxmlformats.org/drawingml/2006/main" noGrp="1"/>
-          </p:cNvSpPr>
-          <p:nvPr/>
-        </p:nvSpPr>
-        <p:spPr>
-          <a:xfrm xmlns:a="http://schemas.openxmlformats.org/drawingml/2006/main">
-            <a:off x="1000125" y="3762375"/>
-            <a:ext cx="476250" cy="419100"/>
+                <a16:creationId xmlns:a16="http://schemas.microsoft.com/office/drawing/2014/main" id="{8D3B5FF5-0DFE-4FCB-A9CB-BFE839240880}"/>
+              </a:ext>
+            </a:extLst>
+          </p:cNvPr>
+          <p:cNvSpPr>
+            <a:spLocks xmlns:a="http://schemas.openxmlformats.org/drawingml/2006/main" noGrp="1"/>
+          </p:cNvSpPr>
+          <p:nvPr/>
+        </p:nvSpPr>
+        <p:spPr>
+          <a:xfrm xmlns:a="http://schemas.openxmlformats.org/drawingml/2006/main">
+            <a:off x="1162050" y="3952875"/>
+            <a:ext cx="400050" cy="400050"/>
           </a:xfrm>
           <a:prstGeom xmlns:a="http://schemas.openxmlformats.org/drawingml/2006/main" prst="rect">
             <a:avLst/>
@@ -8614,9 +8620,9 @@
           <a:lstStyle xmlns:a="http://schemas.openxmlformats.org/drawingml/2006/main"/>
           <a:p xmlns:a="http://schemas.openxmlformats.org/drawingml/2006/main">
             <a:pPr algn="ctr">
-              <a:defRPr sz="1350" b="1">
-                <a:solidFill>
-                  <a:srgbClr val="FFFFFF"/>
+              <a:defRPr sz="1125" b="1">
+                <a:solidFill>
+                  <a:srgbClr val="2C6E73"/>
                 </a:solidFill>
                 <a:latin typeface="Arial"/>
                 <a:ea typeface="Arial"/>
@@ -8624,9 +8630,9 @@
               </a:defRPr>
             </a:pPr>
             <a:r>
-              <a:rPr sz="1350" b="1">
-                <a:solidFill>
-                  <a:srgbClr val="FFFFFF"/>
+              <a:rPr sz="1125" b="1">
+                <a:solidFill>
+                  <a:srgbClr val="2C6E73"/>
                 </a:solidFill>
                 <a:latin typeface="Arial"/>
                 <a:ea typeface="Arial"/>
@@ -8642,19 +8648,19 @@
           <p:cNvPr id="19" name="">
             <a:extLst xmlns:a="http://schemas.openxmlformats.org/drawingml/2006/main">
               <a:ext uri="{FF2B5EF4-FFF2-40B4-BE49-F238E27FC236}">
-                <a16:creationId xmlns:a16="http://schemas.microsoft.com/office/drawing/2014/main" id="{5CA97DE4-D794-4FC1-9CCB-B4906FB31360}"/>
-              </a:ext>
-            </a:extLst>
-          </p:cNvPr>
-          <p:cNvSpPr>
-            <a:spLocks xmlns:a="http://schemas.openxmlformats.org/drawingml/2006/main" noGrp="1"/>
-          </p:cNvSpPr>
-          <p:nvPr/>
-        </p:nvSpPr>
-        <p:spPr>
-          <a:xfrm xmlns:a="http://schemas.openxmlformats.org/drawingml/2006/main">
-            <a:off x="1714500" y="3667125"/>
-            <a:ext cx="9429750" cy="609600"/>
+                <a16:creationId xmlns:a16="http://schemas.microsoft.com/office/drawing/2014/main" id="{E74EE62C-D700-43DC-A05D-CB7EC29A6CB5}"/>
+              </a:ext>
+            </a:extLst>
+          </p:cNvPr>
+          <p:cNvSpPr>
+            <a:spLocks xmlns:a="http://schemas.openxmlformats.org/drawingml/2006/main" noGrp="1"/>
+          </p:cNvSpPr>
+          <p:nvPr/>
+        </p:nvSpPr>
+        <p:spPr>
+          <a:xfrm xmlns:a="http://schemas.openxmlformats.org/drawingml/2006/main">
+            <a:off x="1714500" y="3867150"/>
+            <a:ext cx="9525000" cy="809625"/>
           </a:xfrm>
           <a:prstGeom xmlns:a="http://schemas.openxmlformats.org/drawingml/2006/main" prst="rect">
             <a:avLst/>
@@ -8671,7 +8677,7 @@
           <a:lstStyle xmlns:a="http://schemas.openxmlformats.org/drawingml/2006/main"/>
           <a:p xmlns:a="http://schemas.openxmlformats.org/drawingml/2006/main">
             <a:pPr algn="l">
-              <a:defRPr sz="1500" b="0">
+              <a:defRPr sz="1725" b="0">
                 <a:solidFill>
                   <a:srgbClr val="17253A"/>
                 </a:solidFill>
@@ -8681,7 +8687,7 @@
               </a:defRPr>
             </a:pPr>
             <a:r>
-              <a:rPr sz="1500" b="0">
+              <a:rPr sz="1725" b="0">
                 <a:solidFill>
                   <a:srgbClr val="17253A"/>
                 </a:solidFill>
@@ -8689,7 +8695,7 @@
                 <a:ea typeface="Arial"/>
                 <a:cs typeface="Arial"/>
               </a:rPr>
-              <a:t>Complete the calculation: 6,750,000; 6,700,000; 7,000,000.</a:t>
+              <a:t>Nearest 1,000,000: 748,219 ≥ 500,000</a:t>
             </a:r>
           </a:p>
         </p:txBody>
@@ -8699,28 +8705,30 @@
           <p:cNvPr id="20" name="">
             <a:extLst xmlns:a="http://schemas.openxmlformats.org/drawingml/2006/main">
               <a:ext uri="{FF2B5EF4-FFF2-40B4-BE49-F238E27FC236}">
-                <a16:creationId xmlns:a16="http://schemas.microsoft.com/office/drawing/2014/main" id="{8AE34374-D70E-4D94-A9A8-F0695A5B8381}"/>
-              </a:ext>
-            </a:extLst>
-          </p:cNvPr>
-          <p:cNvSpPr>
-            <a:spLocks xmlns:a="http://schemas.openxmlformats.org/drawingml/2006/main" noGrp="1"/>
-          </p:cNvSpPr>
-          <p:nvPr/>
-        </p:nvSpPr>
-        <p:spPr>
-          <a:xfrm xmlns:a="http://schemas.openxmlformats.org/drawingml/2006/main">
-            <a:off x="1000125" y="4476750"/>
-            <a:ext cx="476250" cy="476250"/>
-          </a:xfrm>
-          <a:prstGeom xmlns:a="http://schemas.openxmlformats.org/drawingml/2006/main" prst="ellipse">
+                <a16:creationId xmlns:a16="http://schemas.microsoft.com/office/drawing/2014/main" id="{D65E853F-5CE0-4182-A14E-69926B815B52}"/>
+              </a:ext>
+            </a:extLst>
+          </p:cNvPr>
+          <p:cNvSpPr>
+            <a:spLocks xmlns:a="http://schemas.openxmlformats.org/drawingml/2006/main" noGrp="1"/>
+          </p:cNvSpPr>
+          <p:nvPr/>
+        </p:nvSpPr>
+        <p:spPr>
+          <a:xfrm xmlns:a="http://schemas.openxmlformats.org/drawingml/2006/main">
+            <a:off x="1714500" y="4695825"/>
+            <a:ext cx="9334500" cy="9525"/>
+          </a:xfrm>
+          <a:prstGeom xmlns:a="http://schemas.openxmlformats.org/drawingml/2006/main" prst="rect">
             <a:avLst/>
           </a:prstGeom>
           <a:solidFill xmlns:a="http://schemas.openxmlformats.org/drawingml/2006/main">
-            <a:srgbClr val="2C6E73"/>
+            <a:srgbClr val="D9E0E6"/>
           </a:solidFill>
           <a:ln xmlns:a="http://schemas.openxmlformats.org/drawingml/2006/main" w="0">
-            <a:noFill/>
+            <a:solidFill>
+              <a:srgbClr val="D9E0E6"/>
+            </a:solidFill>
           </a:ln>
         </p:spPr>
       </p:sp>
@@ -8729,19 +8737,19 @@
           <p:cNvPr id="21" name="">
             <a:extLst xmlns:a="http://schemas.openxmlformats.org/drawingml/2006/main">
               <a:ext uri="{FF2B5EF4-FFF2-40B4-BE49-F238E27FC236}">
-                <a16:creationId xmlns:a16="http://schemas.microsoft.com/office/drawing/2014/main" id="{FEB27172-B18E-418F-AC05-E113925417BA}"/>
-              </a:ext>
-            </a:extLst>
-          </p:cNvPr>
-          <p:cNvSpPr>
-            <a:spLocks xmlns:a="http://schemas.openxmlformats.org/drawingml/2006/main" noGrp="1"/>
-          </p:cNvSpPr>
-          <p:nvPr/>
-        </p:nvSpPr>
-        <p:spPr>
-          <a:xfrm xmlns:a="http://schemas.openxmlformats.org/drawingml/2006/main">
-            <a:off x="1000125" y="4505325"/>
-            <a:ext cx="476250" cy="419100"/>
+                <a16:creationId xmlns:a16="http://schemas.microsoft.com/office/drawing/2014/main" id="{FED95D7E-31D0-4F18-91BF-AC9764DA7436}"/>
+              </a:ext>
+            </a:extLst>
+          </p:cNvPr>
+          <p:cNvSpPr>
+            <a:spLocks xmlns:a="http://schemas.openxmlformats.org/drawingml/2006/main" noGrp="1"/>
+          </p:cNvSpPr>
+          <p:nvPr/>
+        </p:nvSpPr>
+        <p:spPr>
+          <a:xfrm xmlns:a="http://schemas.openxmlformats.org/drawingml/2006/main">
+            <a:off x="1162050" y="4829175"/>
+            <a:ext cx="400050" cy="400050"/>
           </a:xfrm>
           <a:prstGeom xmlns:a="http://schemas.openxmlformats.org/drawingml/2006/main" prst="rect">
             <a:avLst/>
@@ -8758,9 +8766,9 @@
           <a:lstStyle xmlns:a="http://schemas.openxmlformats.org/drawingml/2006/main"/>
           <a:p xmlns:a="http://schemas.openxmlformats.org/drawingml/2006/main">
             <a:pPr algn="ctr">
-              <a:defRPr sz="1350" b="1">
-                <a:solidFill>
-                  <a:srgbClr val="FFFFFF"/>
+              <a:defRPr sz="1125" b="1">
+                <a:solidFill>
+                  <a:srgbClr val="2F785D"/>
                 </a:solidFill>
                 <a:latin typeface="Arial"/>
                 <a:ea typeface="Arial"/>
@@ -8768,9 +8776,9 @@
               </a:defRPr>
             </a:pPr>
             <a:r>
-              <a:rPr sz="1350" b="1">
-                <a:solidFill>
-                  <a:srgbClr val="FFFFFF"/>
+              <a:rPr sz="1125" b="1">
+                <a:solidFill>
+                  <a:srgbClr val="2F785D"/>
                 </a:solidFill>
                 <a:latin typeface="Arial"/>
                 <a:ea typeface="Arial"/>
@@ -8786,19 +8794,19 @@
           <p:cNvPr id="22" name="">
             <a:extLst xmlns:a="http://schemas.openxmlformats.org/drawingml/2006/main">
               <a:ext uri="{FF2B5EF4-FFF2-40B4-BE49-F238E27FC236}">
-                <a16:creationId xmlns:a16="http://schemas.microsoft.com/office/drawing/2014/main" id="{EFDF071A-BDE0-49DF-BA25-C4BFB3DC135C}"/>
-              </a:ext>
-            </a:extLst>
-          </p:cNvPr>
-          <p:cNvSpPr>
-            <a:spLocks xmlns:a="http://schemas.openxmlformats.org/drawingml/2006/main" noGrp="1"/>
-          </p:cNvSpPr>
-          <p:nvPr/>
-        </p:nvSpPr>
-        <p:spPr>
-          <a:xfrm xmlns:a="http://schemas.openxmlformats.org/drawingml/2006/main">
-            <a:off x="1714500" y="4410075"/>
-            <a:ext cx="9429750" cy="609600"/>
+                <a16:creationId xmlns:a16="http://schemas.microsoft.com/office/drawing/2014/main" id="{CB8CF5C3-0048-4264-85E8-D252142498AE}"/>
+              </a:ext>
+            </a:extLst>
+          </p:cNvPr>
+          <p:cNvSpPr>
+            <a:spLocks xmlns:a="http://schemas.openxmlformats.org/drawingml/2006/main" noGrp="1"/>
+          </p:cNvSpPr>
+          <p:nvPr/>
+        </p:nvSpPr>
+        <p:spPr>
+          <a:xfrm xmlns:a="http://schemas.openxmlformats.org/drawingml/2006/main">
+            <a:off x="1714500" y="4743450"/>
+            <a:ext cx="9525000" cy="809625"/>
           </a:xfrm>
           <a:prstGeom xmlns:a="http://schemas.openxmlformats.org/drawingml/2006/main" prst="rect">
             <a:avLst/>
@@ -8815,7 +8823,7 @@
           <a:lstStyle xmlns:a="http://schemas.openxmlformats.org/drawingml/2006/main"/>
           <a:p xmlns:a="http://schemas.openxmlformats.org/drawingml/2006/main">
             <a:pPr algn="l">
-              <a:defRPr sz="1500" b="1">
+              <a:defRPr sz="1725" b="1">
                 <a:solidFill>
                   <a:srgbClr val="2F785D"/>
                 </a:solidFill>
@@ -8825,7 +8833,7 @@
               </a:defRPr>
             </a:pPr>
             <a:r>
-              <a:rPr sz="1500" b="1">
+              <a:rPr sz="1725" b="1">
                 <a:solidFill>
                   <a:srgbClr val="2F785D"/>
                 </a:solidFill>
@@ -8833,7 +8841,7 @@
                 <a:ea typeface="Arial"/>
                 <a:cs typeface="Arial"/>
               </a:rPr>
-              <a:t>Check the result: Round to the nearer multiple and replace following digits with zeros.</a:t>
+              <a:t>6,748,219 → 7,000,000</a:t>
             </a:r>
           </a:p>
         </p:txBody>
@@ -8841,7 +8849,7 @@
     </p:spTree>
     <p:extLst>
       <p:ext uri="{BB962C8B-B14F-4D97-AF65-F5344CB8AC3E}">
-        <p14:creationId xmlns:p14="http://schemas.microsoft.com/office/powerpoint/2010/main" val="1233730389"/>
+        <p14:creationId xmlns:p14="http://schemas.microsoft.com/office/powerpoint/2010/main" val="176308684"/>
       </p:ext>
     </p:extLst>
   </p:cSld>
@@ -9134,7 +9142,7 @@
           <p:cNvPr id="15" name="">
             <a:extLst xmlns:a="http://schemas.openxmlformats.org/drawingml/2006/main">
               <a:ext uri="{FF2B5EF4-FFF2-40B4-BE49-F238E27FC236}">
-                <a16:creationId xmlns:a16="http://schemas.microsoft.com/office/drawing/2014/main" id="{BD56CE41-85EA-45B0-8144-4810295FE6E6}"/>
+                <a16:creationId xmlns:a16="http://schemas.microsoft.com/office/drawing/2014/main" id="{588CBC67-E58E-4047-9A65-F46F1C6A005D}"/>
               </a:ext>
             </a:extLst>
           </p:cNvPr>
@@ -9166,7 +9174,7 @@
           <p:cNvPr id="2" name="">
             <a:extLst xmlns:a="http://schemas.openxmlformats.org/drawingml/2006/main">
               <a:ext uri="{FF2B5EF4-FFF2-40B4-BE49-F238E27FC236}">
-                <a16:creationId xmlns:a16="http://schemas.microsoft.com/office/drawing/2014/main" id="{2534A85B-AC3A-4DA0-AAC1-201DF18B93B7}"/>
+                <a16:creationId xmlns:a16="http://schemas.microsoft.com/office/drawing/2014/main" id="{64D63B62-770F-4CFF-A6B9-A9EB62DA4BAF}"/>
               </a:ext>
             </a:extLst>
           </p:cNvPr>
@@ -9223,7 +9231,7 @@
           <p:cNvPr id="3" name="">
             <a:extLst xmlns:a="http://schemas.openxmlformats.org/drawingml/2006/main">
               <a:ext uri="{FF2B5EF4-FFF2-40B4-BE49-F238E27FC236}">
-                <a16:creationId xmlns:a16="http://schemas.microsoft.com/office/drawing/2014/main" id="{54ACE159-176A-4101-98AF-9D5EE391ED28}"/>
+                <a16:creationId xmlns:a16="http://schemas.microsoft.com/office/drawing/2014/main" id="{80A29236-5ECA-4190-9606-C0622DFA515B}"/>
               </a:ext>
             </a:extLst>
           </p:cNvPr>
@@ -9255,7 +9263,7 @@
           <p:cNvPr id="4" name="">
             <a:extLst xmlns:a="http://schemas.openxmlformats.org/drawingml/2006/main">
               <a:ext uri="{FF2B5EF4-FFF2-40B4-BE49-F238E27FC236}">
-                <a16:creationId xmlns:a16="http://schemas.microsoft.com/office/drawing/2014/main" id="{10F5AD98-956C-4E46-9D25-784B147FF82E}"/>
+                <a16:creationId xmlns:a16="http://schemas.microsoft.com/office/drawing/2014/main" id="{A64F5A56-850D-4F1D-A069-6BA9D2FED1C2}"/>
               </a:ext>
             </a:extLst>
           </p:cNvPr>
@@ -9312,7 +9320,7 @@
           <p:cNvPr id="5" name="">
             <a:extLst xmlns:a="http://schemas.openxmlformats.org/drawingml/2006/main">
               <a:ext uri="{FF2B5EF4-FFF2-40B4-BE49-F238E27FC236}">
-                <a16:creationId xmlns:a16="http://schemas.microsoft.com/office/drawing/2014/main" id="{3C9E0B62-CD68-46A7-9848-A28F97F26F08}"/>
+                <a16:creationId xmlns:a16="http://schemas.microsoft.com/office/drawing/2014/main" id="{C10DF976-C057-4171-8971-346B885F8096}"/>
               </a:ext>
             </a:extLst>
           </p:cNvPr>
@@ -9369,7 +9377,7 @@
           <p:cNvPr id="6" name="">
             <a:extLst xmlns:a="http://schemas.openxmlformats.org/drawingml/2006/main">
               <a:ext uri="{FF2B5EF4-FFF2-40B4-BE49-F238E27FC236}">
-                <a16:creationId xmlns:a16="http://schemas.microsoft.com/office/drawing/2014/main" id="{BAB45F9A-5A7D-4F2D-AE84-FDDE5F4E8D23}"/>
+                <a16:creationId xmlns:a16="http://schemas.microsoft.com/office/drawing/2014/main" id="{5479E553-72A8-4849-83C3-532CEC63CAE8}"/>
               </a:ext>
             </a:extLst>
           </p:cNvPr>
@@ -9426,7 +9434,7 @@
           <p:cNvPr id="7" name="">
             <a:extLst xmlns:a="http://schemas.openxmlformats.org/drawingml/2006/main">
               <a:ext uri="{FF2B5EF4-FFF2-40B4-BE49-F238E27FC236}">
-                <a16:creationId xmlns:a16="http://schemas.microsoft.com/office/drawing/2014/main" id="{5AE8DF9F-DA55-4BF0-B024-CFD5C058485C}"/>
+                <a16:creationId xmlns:a16="http://schemas.microsoft.com/office/drawing/2014/main" id="{7BA01495-0884-4A3E-AD92-A3AE5037BA8B}"/>
               </a:ext>
             </a:extLst>
           </p:cNvPr>
@@ -9458,7 +9466,7 @@
           <p:cNvPr id="8" name="">
             <a:extLst xmlns:a="http://schemas.openxmlformats.org/drawingml/2006/main">
               <a:ext uri="{FF2B5EF4-FFF2-40B4-BE49-F238E27FC236}">
-                <a16:creationId xmlns:a16="http://schemas.microsoft.com/office/drawing/2014/main" id="{DE7A0C09-F3D9-4F8E-AC37-8A383DEF907D}"/>
+                <a16:creationId xmlns:a16="http://schemas.microsoft.com/office/drawing/2014/main" id="{577C885C-318D-48EA-9294-D69F4EB7C5A3}"/>
               </a:ext>
             </a:extLst>
           </p:cNvPr>
@@ -9515,7 +9523,7 @@
           <p:cNvPr id="9" name="">
             <a:extLst xmlns:a="http://schemas.openxmlformats.org/drawingml/2006/main">
               <a:ext uri="{FF2B5EF4-FFF2-40B4-BE49-F238E27FC236}">
-                <a16:creationId xmlns:a16="http://schemas.microsoft.com/office/drawing/2014/main" id="{A69F5ADE-06C0-4913-8F9B-9CA7287C8251}"/>
+                <a16:creationId xmlns:a16="http://schemas.microsoft.com/office/drawing/2014/main" id="{97CA6855-E11C-4B40-BB1D-3D5BEAAB64A9}"/>
               </a:ext>
             </a:extLst>
           </p:cNvPr>
@@ -9572,7 +9580,7 @@
           <p:cNvPr id="10" name="">
             <a:extLst xmlns:a="http://schemas.openxmlformats.org/drawingml/2006/main">
               <a:ext uri="{FF2B5EF4-FFF2-40B4-BE49-F238E27FC236}">
-                <a16:creationId xmlns:a16="http://schemas.microsoft.com/office/drawing/2014/main" id="{FBD41C60-27F9-4F24-9867-83DFFAD51BAB}"/>
+                <a16:creationId xmlns:a16="http://schemas.microsoft.com/office/drawing/2014/main" id="{514BD916-363D-49D3-80AD-59AD3699B574}"/>
               </a:ext>
             </a:extLst>
           </p:cNvPr>
@@ -9629,7 +9637,7 @@
           <p:cNvPr id="11" name="">
             <a:extLst xmlns:a="http://schemas.openxmlformats.org/drawingml/2006/main">
               <a:ext uri="{FF2B5EF4-FFF2-40B4-BE49-F238E27FC236}">
-                <a16:creationId xmlns:a16="http://schemas.microsoft.com/office/drawing/2014/main" id="{8263D7C0-B650-4DC0-BCEA-11DD41B3BB48}"/>
+                <a16:creationId xmlns:a16="http://schemas.microsoft.com/office/drawing/2014/main" id="{6940C3E1-D9ED-4D2E-9571-9BD00B5E5C1B}"/>
               </a:ext>
             </a:extLst>
           </p:cNvPr>
@@ -9686,7 +9694,7 @@
           <p:cNvPr id="12" name="">
             <a:extLst xmlns:a="http://schemas.openxmlformats.org/drawingml/2006/main">
               <a:ext uri="{FF2B5EF4-FFF2-40B4-BE49-F238E27FC236}">
-                <a16:creationId xmlns:a16="http://schemas.microsoft.com/office/drawing/2014/main" id="{6D2E54A8-BCAC-4D3E-B3C4-80A422E321E4}"/>
+                <a16:creationId xmlns:a16="http://schemas.microsoft.com/office/drawing/2014/main" id="{46DCDE1B-FF57-4055-82DC-A01810D68AD5}"/>
               </a:ext>
             </a:extLst>
           </p:cNvPr>
@@ -9718,7 +9726,7 @@
           <p:cNvPr id="13" name="">
             <a:extLst xmlns:a="http://schemas.openxmlformats.org/drawingml/2006/main">
               <a:ext uri="{FF2B5EF4-FFF2-40B4-BE49-F238E27FC236}">
-                <a16:creationId xmlns:a16="http://schemas.microsoft.com/office/drawing/2014/main" id="{7E7E4184-908D-46B3-8C0D-3A4AA8AD52DC}"/>
+                <a16:creationId xmlns:a16="http://schemas.microsoft.com/office/drawing/2014/main" id="{3E376939-B5FE-4B26-B1DD-321C1A3E50F0}"/>
               </a:ext>
             </a:extLst>
           </p:cNvPr>
@@ -9775,7 +9783,7 @@
           <p:cNvPr id="14" name="">
             <a:extLst xmlns:a="http://schemas.openxmlformats.org/drawingml/2006/main">
               <a:ext uri="{FF2B5EF4-FFF2-40B4-BE49-F238E27FC236}">
-                <a16:creationId xmlns:a16="http://schemas.microsoft.com/office/drawing/2014/main" id="{D20A1054-8276-4195-AD9E-B51B2FBD1A08}"/>
+                <a16:creationId xmlns:a16="http://schemas.microsoft.com/office/drawing/2014/main" id="{3075C41E-7976-4D0E-9052-BE5899C8EEDB}"/>
               </a:ext>
             </a:extLst>
           </p:cNvPr>
@@ -9830,7 +9838,7 @@
     </p:spTree>
     <p:extLst>
       <p:ext uri="{BB962C8B-B14F-4D97-AF65-F5344CB8AC3E}">
-        <p14:creationId xmlns:p14="http://schemas.microsoft.com/office/powerpoint/2010/main" val="826725606"/>
+        <p14:creationId xmlns:p14="http://schemas.microsoft.com/office/powerpoint/2010/main" val="1448844152"/>
       </p:ext>
     </p:extLst>
   </p:cSld>
@@ -10031,7 +10039,7 @@
           <p:cNvPr id="16" name="">
             <a:extLst xmlns:a="http://schemas.openxmlformats.org/drawingml/2006/main">
               <a:ext uri="{FF2B5EF4-FFF2-40B4-BE49-F238E27FC236}">
-                <a16:creationId xmlns:a16="http://schemas.microsoft.com/office/drawing/2014/main" id="{B29A0FC1-50BE-4B94-8160-BA22CBCEAA59}"/>
+                <a16:creationId xmlns:a16="http://schemas.microsoft.com/office/drawing/2014/main" id="{1D855391-A295-4302-ACB9-C75C2B7DCC4C}"/>
               </a:ext>
             </a:extLst>
           </p:cNvPr>
@@ -10063,7 +10071,7 @@
           <p:cNvPr id="2" name="">
             <a:extLst xmlns:a="http://schemas.openxmlformats.org/drawingml/2006/main">
               <a:ext uri="{FF2B5EF4-FFF2-40B4-BE49-F238E27FC236}">
-                <a16:creationId xmlns:a16="http://schemas.microsoft.com/office/drawing/2014/main" id="{169C4119-0CE2-4C86-8C74-ED73283269DA}"/>
+                <a16:creationId xmlns:a16="http://schemas.microsoft.com/office/drawing/2014/main" id="{9E54D7B3-0470-468C-BAA6-3357E31C0025}"/>
               </a:ext>
             </a:extLst>
           </p:cNvPr>
@@ -10120,7 +10128,7 @@
           <p:cNvPr id="3" name="">
             <a:extLst xmlns:a="http://schemas.openxmlformats.org/drawingml/2006/main">
               <a:ext uri="{FF2B5EF4-FFF2-40B4-BE49-F238E27FC236}">
-                <a16:creationId xmlns:a16="http://schemas.microsoft.com/office/drawing/2014/main" id="{A159082F-D797-4089-894E-59B638988712}"/>
+                <a16:creationId xmlns:a16="http://schemas.microsoft.com/office/drawing/2014/main" id="{5D5E65C5-DC9C-4466-B325-DA71EACA7CC9}"/>
               </a:ext>
             </a:extLst>
           </p:cNvPr>
@@ -10152,7 +10160,7 @@
           <p:cNvPr id="4" name="">
             <a:extLst xmlns:a="http://schemas.openxmlformats.org/drawingml/2006/main">
               <a:ext uri="{FF2B5EF4-FFF2-40B4-BE49-F238E27FC236}">
-                <a16:creationId xmlns:a16="http://schemas.microsoft.com/office/drawing/2014/main" id="{A8D24CAA-56E2-41DA-8649-9E663B1BD041}"/>
+                <a16:creationId xmlns:a16="http://schemas.microsoft.com/office/drawing/2014/main" id="{9032EE0F-E764-458C-A51B-82E3944FE17E}"/>
               </a:ext>
             </a:extLst>
           </p:cNvPr>
@@ -10209,7 +10217,7 @@
           <p:cNvPr id="5" name="">
             <a:extLst xmlns:a="http://schemas.openxmlformats.org/drawingml/2006/main">
               <a:ext uri="{FF2B5EF4-FFF2-40B4-BE49-F238E27FC236}">
-                <a16:creationId xmlns:a16="http://schemas.microsoft.com/office/drawing/2014/main" id="{07B2A45D-F235-452A-838B-30F442E4AD2C}"/>
+                <a16:creationId xmlns:a16="http://schemas.microsoft.com/office/drawing/2014/main" id="{07E31BC9-077C-4B68-A6D0-0656C980AE3A}"/>
               </a:ext>
             </a:extLst>
           </p:cNvPr>
@@ -10266,7 +10274,7 @@
           <p:cNvPr id="6" name="">
             <a:extLst xmlns:a="http://schemas.openxmlformats.org/drawingml/2006/main">
               <a:ext uri="{FF2B5EF4-FFF2-40B4-BE49-F238E27FC236}">
-                <a16:creationId xmlns:a16="http://schemas.microsoft.com/office/drawing/2014/main" id="{C730F077-5BBB-44FC-BCB0-75B22E7938CE}"/>
+                <a16:creationId xmlns:a16="http://schemas.microsoft.com/office/drawing/2014/main" id="{214D42D0-5C0B-4EA6-AB2D-4E999623AE30}"/>
               </a:ext>
             </a:extLst>
           </p:cNvPr>
@@ -10323,7 +10331,7 @@
           <p:cNvPr id="7" name="">
             <a:extLst xmlns:a="http://schemas.openxmlformats.org/drawingml/2006/main">
               <a:ext uri="{FF2B5EF4-FFF2-40B4-BE49-F238E27FC236}">
-                <a16:creationId xmlns:a16="http://schemas.microsoft.com/office/drawing/2014/main" id="{C34C1852-FFF0-4913-B971-3061B14B8014}"/>
+                <a16:creationId xmlns:a16="http://schemas.microsoft.com/office/drawing/2014/main" id="{6DE5184C-2A02-43BE-8AD3-762FD73DB1AB}"/>
               </a:ext>
             </a:extLst>
           </p:cNvPr>
@@ -10355,7 +10363,7 @@
           <p:cNvPr id="8" name="">
             <a:extLst xmlns:a="http://schemas.openxmlformats.org/drawingml/2006/main">
               <a:ext uri="{FF2B5EF4-FFF2-40B4-BE49-F238E27FC236}">
-                <a16:creationId xmlns:a16="http://schemas.microsoft.com/office/drawing/2014/main" id="{D927B377-A448-439B-88CE-900794B9ABEF}"/>
+                <a16:creationId xmlns:a16="http://schemas.microsoft.com/office/drawing/2014/main" id="{36CDB7B8-7D05-43DE-AFE9-70EC4B505642}"/>
               </a:ext>
             </a:extLst>
           </p:cNvPr>
@@ -10412,7 +10420,7 @@
           <p:cNvPr id="9" name="">
             <a:extLst xmlns:a="http://schemas.openxmlformats.org/drawingml/2006/main">
               <a:ext uri="{FF2B5EF4-FFF2-40B4-BE49-F238E27FC236}">
-                <a16:creationId xmlns:a16="http://schemas.microsoft.com/office/drawing/2014/main" id="{759877B6-0BF3-4F3F-BD8A-0D3D6CEF11EA}"/>
+                <a16:creationId xmlns:a16="http://schemas.microsoft.com/office/drawing/2014/main" id="{F67AE92E-77AD-4899-ABE8-F354BEEDD96F}"/>
               </a:ext>
             </a:extLst>
           </p:cNvPr>
@@ -10469,7 +10477,7 @@
           <p:cNvPr id="10" name="">
             <a:extLst xmlns:a="http://schemas.openxmlformats.org/drawingml/2006/main">
               <a:ext uri="{FF2B5EF4-FFF2-40B4-BE49-F238E27FC236}">
-                <a16:creationId xmlns:a16="http://schemas.microsoft.com/office/drawing/2014/main" id="{6DEC18F6-1A70-43CF-9307-8F62295BC9D9}"/>
+                <a16:creationId xmlns:a16="http://schemas.microsoft.com/office/drawing/2014/main" id="{901C432A-4F6F-49E7-BAAD-A8C51C32D7CB}"/>
               </a:ext>
             </a:extLst>
           </p:cNvPr>
@@ -10526,7 +10534,7 @@
           <p:cNvPr id="11" name="">
             <a:extLst xmlns:a="http://schemas.openxmlformats.org/drawingml/2006/main">
               <a:ext uri="{FF2B5EF4-FFF2-40B4-BE49-F238E27FC236}">
-                <a16:creationId xmlns:a16="http://schemas.microsoft.com/office/drawing/2014/main" id="{CDE51445-9FE1-4FCF-B8FB-4BA5309D0A6C}"/>
+                <a16:creationId xmlns:a16="http://schemas.microsoft.com/office/drawing/2014/main" id="{2EFB928B-E8A9-4E0C-80B1-D011A9F66EEF}"/>
               </a:ext>
             </a:extLst>
           </p:cNvPr>
@@ -10583,7 +10591,7 @@
           <p:cNvPr id="12" name="">
             <a:extLst xmlns:a="http://schemas.openxmlformats.org/drawingml/2006/main">
               <a:ext uri="{FF2B5EF4-FFF2-40B4-BE49-F238E27FC236}">
-                <a16:creationId xmlns:a16="http://schemas.microsoft.com/office/drawing/2014/main" id="{C8C01B2F-5CEE-4444-B178-4C331E52CAF5}"/>
+                <a16:creationId xmlns:a16="http://schemas.microsoft.com/office/drawing/2014/main" id="{68E0CE83-F2BF-47FF-9F66-C8B8EBB205A0}"/>
               </a:ext>
             </a:extLst>
           </p:cNvPr>
@@ -10640,7 +10648,7 @@
           <p:cNvPr id="13" name="">
             <a:extLst xmlns:a="http://schemas.openxmlformats.org/drawingml/2006/main">
               <a:ext uri="{FF2B5EF4-FFF2-40B4-BE49-F238E27FC236}">
-                <a16:creationId xmlns:a16="http://schemas.microsoft.com/office/drawing/2014/main" id="{7280A299-989C-4032-B989-EC597502D121}"/>
+                <a16:creationId xmlns:a16="http://schemas.microsoft.com/office/drawing/2014/main" id="{3D4A4CBA-AFCF-494A-B264-12BC9BEAB2FB}"/>
               </a:ext>
             </a:extLst>
           </p:cNvPr>
@@ -10697,7 +10705,7 @@
           <p:cNvPr id="14" name="">
             <a:extLst xmlns:a="http://schemas.openxmlformats.org/drawingml/2006/main">
               <a:ext uri="{FF2B5EF4-FFF2-40B4-BE49-F238E27FC236}">
-                <a16:creationId xmlns:a16="http://schemas.microsoft.com/office/drawing/2014/main" id="{98232A4F-8C58-4205-9FFA-F8F887938401}"/>
+                <a16:creationId xmlns:a16="http://schemas.microsoft.com/office/drawing/2014/main" id="{C938F0DB-6AA6-4E25-B5C5-FCEE9D4946A2}"/>
               </a:ext>
             </a:extLst>
           </p:cNvPr>
@@ -10754,7 +10762,7 @@
           <p:cNvPr id="15" name="">
             <a:extLst xmlns:a="http://schemas.openxmlformats.org/drawingml/2006/main">
               <a:ext uri="{FF2B5EF4-FFF2-40B4-BE49-F238E27FC236}">
-                <a16:creationId xmlns:a16="http://schemas.microsoft.com/office/drawing/2014/main" id="{2EC5A12B-3044-4863-9F29-A03CE07C7810}"/>
+                <a16:creationId xmlns:a16="http://schemas.microsoft.com/office/drawing/2014/main" id="{00CDB645-E6A1-4949-BEAD-342A279F8683}"/>
               </a:ext>
             </a:extLst>
           </p:cNvPr>
@@ -10809,7 +10817,7 @@
     </p:spTree>
     <p:extLst>
       <p:ext uri="{BB962C8B-B14F-4D97-AF65-F5344CB8AC3E}">
-        <p14:creationId xmlns:p14="http://schemas.microsoft.com/office/powerpoint/2010/main" val="958566275"/>
+        <p14:creationId xmlns:p14="http://schemas.microsoft.com/office/powerpoint/2010/main" val="1216389672"/>
       </p:ext>
     </p:extLst>
   </p:cSld>
@@ -10964,7 +10972,7 @@
           <p:cNvPr id="16" name="">
             <a:extLst xmlns:a="http://schemas.openxmlformats.org/drawingml/2006/main">
               <a:ext uri="{FF2B5EF4-FFF2-40B4-BE49-F238E27FC236}">
-                <a16:creationId xmlns:a16="http://schemas.microsoft.com/office/drawing/2014/main" id="{2989ABC0-FD1D-41FD-A733-8B20E71595CC}"/>
+                <a16:creationId xmlns:a16="http://schemas.microsoft.com/office/drawing/2014/main" id="{7940510E-DE9D-430D-926F-03A655DD7DA0}"/>
               </a:ext>
             </a:extLst>
           </p:cNvPr>
@@ -10996,7 +11004,7 @@
           <p:cNvPr id="2" name="">
             <a:extLst xmlns:a="http://schemas.openxmlformats.org/drawingml/2006/main">
               <a:ext uri="{FF2B5EF4-FFF2-40B4-BE49-F238E27FC236}">
-                <a16:creationId xmlns:a16="http://schemas.microsoft.com/office/drawing/2014/main" id="{89AE5895-7BA4-462A-8A33-892831DFD285}"/>
+                <a16:creationId xmlns:a16="http://schemas.microsoft.com/office/drawing/2014/main" id="{96CD1F9E-ADFF-43F5-87A0-90E99A36A3DC}"/>
               </a:ext>
             </a:extLst>
           </p:cNvPr>
@@ -11053,7 +11061,7 @@
           <p:cNvPr id="3" name="">
             <a:extLst xmlns:a="http://schemas.openxmlformats.org/drawingml/2006/main">
               <a:ext uri="{FF2B5EF4-FFF2-40B4-BE49-F238E27FC236}">
-                <a16:creationId xmlns:a16="http://schemas.microsoft.com/office/drawing/2014/main" id="{91A30321-B1A9-4A4E-BFE6-E6A302B15FF4}"/>
+                <a16:creationId xmlns:a16="http://schemas.microsoft.com/office/drawing/2014/main" id="{35B73A4C-9467-4E5C-8913-94079881481C}"/>
               </a:ext>
             </a:extLst>
           </p:cNvPr>
@@ -11085,7 +11093,7 @@
           <p:cNvPr id="4" name="">
             <a:extLst xmlns:a="http://schemas.openxmlformats.org/drawingml/2006/main">
               <a:ext uri="{FF2B5EF4-FFF2-40B4-BE49-F238E27FC236}">
-                <a16:creationId xmlns:a16="http://schemas.microsoft.com/office/drawing/2014/main" id="{4BD4DB19-AFE8-4780-9ACC-1A83E0BD8D60}"/>
+                <a16:creationId xmlns:a16="http://schemas.microsoft.com/office/drawing/2014/main" id="{B18E6E19-436D-41E0-9B9F-EA5100CE7DEB}"/>
               </a:ext>
             </a:extLst>
           </p:cNvPr>
@@ -11142,7 +11150,7 @@
           <p:cNvPr id="5" name="">
             <a:extLst xmlns:a="http://schemas.openxmlformats.org/drawingml/2006/main">
               <a:ext uri="{FF2B5EF4-FFF2-40B4-BE49-F238E27FC236}">
-                <a16:creationId xmlns:a16="http://schemas.microsoft.com/office/drawing/2014/main" id="{FE4B7D53-AED7-49E1-A9C5-F7444FA48AE7}"/>
+                <a16:creationId xmlns:a16="http://schemas.microsoft.com/office/drawing/2014/main" id="{23845AB3-D871-451D-9FD6-BB9DA9608009}"/>
               </a:ext>
             </a:extLst>
           </p:cNvPr>
@@ -11199,7 +11207,7 @@
           <p:cNvPr id="6" name="">
             <a:extLst xmlns:a="http://schemas.openxmlformats.org/drawingml/2006/main">
               <a:ext uri="{FF2B5EF4-FFF2-40B4-BE49-F238E27FC236}">
-                <a16:creationId xmlns:a16="http://schemas.microsoft.com/office/drawing/2014/main" id="{7CABC4DB-F8A2-4204-822C-303763AEA51D}"/>
+                <a16:creationId xmlns:a16="http://schemas.microsoft.com/office/drawing/2014/main" id="{7ADC2344-7E9A-40AA-A334-416C2250EDD0}"/>
               </a:ext>
             </a:extLst>
           </p:cNvPr>
@@ -11256,7 +11264,7 @@
           <p:cNvPr id="7" name="">
             <a:extLst xmlns:a="http://schemas.openxmlformats.org/drawingml/2006/main">
               <a:ext uri="{FF2B5EF4-FFF2-40B4-BE49-F238E27FC236}">
-                <a16:creationId xmlns:a16="http://schemas.microsoft.com/office/drawing/2014/main" id="{67018A5C-49CC-453F-BC4F-A0EE41E627E7}"/>
+                <a16:creationId xmlns:a16="http://schemas.microsoft.com/office/drawing/2014/main" id="{C2420001-67F5-4615-8A4D-004DC4D7CB0C}"/>
               </a:ext>
             </a:extLst>
           </p:cNvPr>
@@ -11288,7 +11296,7 @@
           <p:cNvPr id="8" name="">
             <a:extLst xmlns:a="http://schemas.openxmlformats.org/drawingml/2006/main">
               <a:ext uri="{FF2B5EF4-FFF2-40B4-BE49-F238E27FC236}">
-                <a16:creationId xmlns:a16="http://schemas.microsoft.com/office/drawing/2014/main" id="{2575008B-CD93-42B5-B1BE-1DA4B2C6F999}"/>
+                <a16:creationId xmlns:a16="http://schemas.microsoft.com/office/drawing/2014/main" id="{524D9013-41E3-4966-9D28-1DF13DC40513}"/>
               </a:ext>
             </a:extLst>
           </p:cNvPr>
@@ -11345,7 +11353,7 @@
           <p:cNvPr id="9" name="">
             <a:extLst xmlns:a="http://schemas.openxmlformats.org/drawingml/2006/main">
               <a:ext uri="{FF2B5EF4-FFF2-40B4-BE49-F238E27FC236}">
-                <a16:creationId xmlns:a16="http://schemas.microsoft.com/office/drawing/2014/main" id="{9F125F0D-CD3F-4E60-9416-F2264133A5BC}"/>
+                <a16:creationId xmlns:a16="http://schemas.microsoft.com/office/drawing/2014/main" id="{E756703B-ACC7-4BF2-A0FC-266F69395702}"/>
               </a:ext>
             </a:extLst>
           </p:cNvPr>
@@ -11406,7 +11414,7 @@
           <p:nvPr/>
         </p:nvPicPr>
         <p:blipFill>
-          <a:blip xmlns:r="http://schemas.openxmlformats.org/officeDocument/2006/relationships" xmlns:a="http://schemas.openxmlformats.org/drawingml/2006/main" r:embed="Rfe78ba8775014fea"/>
+          <a:blip xmlns:r="http://schemas.openxmlformats.org/officeDocument/2006/relationships" xmlns:a="http://schemas.openxmlformats.org/drawingml/2006/main" r:embed="R27d0371ffc1d4574"/>
           <a:stretch xmlns:a="http://schemas.openxmlformats.org/drawingml/2006/main"/>
         </p:blipFill>
         <p:spPr>
@@ -11424,7 +11432,7 @@
           <p:cNvPr id="11" name="">
             <a:extLst xmlns:a="http://schemas.openxmlformats.org/drawingml/2006/main">
               <a:ext uri="{FF2B5EF4-FFF2-40B4-BE49-F238E27FC236}">
-                <a16:creationId xmlns:a16="http://schemas.microsoft.com/office/drawing/2014/main" id="{B5DA4704-0BDF-415D-A54C-FF6277DE81ED}"/>
+                <a16:creationId xmlns:a16="http://schemas.microsoft.com/office/drawing/2014/main" id="{845D1E77-DA35-4735-B7BC-98828639C2D7}"/>
               </a:ext>
             </a:extLst>
           </p:cNvPr>
@@ -11481,7 +11489,7 @@
           <p:cNvPr id="12" name="">
             <a:extLst xmlns:a="http://schemas.openxmlformats.org/drawingml/2006/main">
               <a:ext uri="{FF2B5EF4-FFF2-40B4-BE49-F238E27FC236}">
-                <a16:creationId xmlns:a16="http://schemas.microsoft.com/office/drawing/2014/main" id="{7973C5AC-BFB6-4CE6-B584-E3250DD7E98A}"/>
+                <a16:creationId xmlns:a16="http://schemas.microsoft.com/office/drawing/2014/main" id="{CEDA6D11-ABBA-48B2-894A-AB2E5A1029EA}"/>
               </a:ext>
             </a:extLst>
           </p:cNvPr>
@@ -11538,7 +11546,7 @@
           <p:cNvPr id="13" name="">
             <a:extLst xmlns:a="http://schemas.openxmlformats.org/drawingml/2006/main">
               <a:ext uri="{FF2B5EF4-FFF2-40B4-BE49-F238E27FC236}">
-                <a16:creationId xmlns:a16="http://schemas.microsoft.com/office/drawing/2014/main" id="{DA37982F-078B-4EA1-8D0E-14E91B6100C6}"/>
+                <a16:creationId xmlns:a16="http://schemas.microsoft.com/office/drawing/2014/main" id="{08B583FB-9363-423F-97D3-0DA909CE4539}"/>
               </a:ext>
             </a:extLst>
           </p:cNvPr>
@@ -11570,7 +11578,7 @@
           <p:cNvPr id="14" name="">
             <a:extLst xmlns:a="http://schemas.openxmlformats.org/drawingml/2006/main">
               <a:ext uri="{FF2B5EF4-FFF2-40B4-BE49-F238E27FC236}">
-                <a16:creationId xmlns:a16="http://schemas.microsoft.com/office/drawing/2014/main" id="{523946B5-E703-46B2-AE8A-392D7A5F65BB}"/>
+                <a16:creationId xmlns:a16="http://schemas.microsoft.com/office/drawing/2014/main" id="{EF924A6C-E34E-49B9-A60E-E49C43A4CF8D}"/>
               </a:ext>
             </a:extLst>
           </p:cNvPr>
@@ -11627,7 +11635,7 @@
           <p:cNvPr id="15" name="">
             <a:extLst xmlns:a="http://schemas.openxmlformats.org/drawingml/2006/main">
               <a:ext uri="{FF2B5EF4-FFF2-40B4-BE49-F238E27FC236}">
-                <a16:creationId xmlns:a16="http://schemas.microsoft.com/office/drawing/2014/main" id="{86610439-B764-4282-84A0-3DADD60A8395}"/>
+                <a16:creationId xmlns:a16="http://schemas.microsoft.com/office/drawing/2014/main" id="{ABD15AEE-599B-4474-9C19-985FCF9F9B0E}"/>
               </a:ext>
             </a:extLst>
           </p:cNvPr>
@@ -11682,7 +11690,7 @@
     </p:spTree>
     <p:extLst>
       <p:ext uri="{BB962C8B-B14F-4D97-AF65-F5344CB8AC3E}">
-        <p14:creationId xmlns:p14="http://schemas.microsoft.com/office/powerpoint/2010/main" val="396033343"/>
+        <p14:creationId xmlns:p14="http://schemas.microsoft.com/office/powerpoint/2010/main" val="1656480247"/>
       </p:ext>
     </p:extLst>
   </p:cSld>
@@ -11837,7 +11845,7 @@
           <p:cNvPr id="23" name="">
             <a:extLst xmlns:a="http://schemas.openxmlformats.org/drawingml/2006/main">
               <a:ext uri="{FF2B5EF4-FFF2-40B4-BE49-F238E27FC236}">
-                <a16:creationId xmlns:a16="http://schemas.microsoft.com/office/drawing/2014/main" id="{9643A301-53E4-4013-95C5-8D137C44AA67}"/>
+                <a16:creationId xmlns:a16="http://schemas.microsoft.com/office/drawing/2014/main" id="{37C2D581-8999-46D2-B245-A26EFCE9642F}"/>
               </a:ext>
             </a:extLst>
           </p:cNvPr>
@@ -11869,7 +11877,7 @@
           <p:cNvPr id="2" name="">
             <a:extLst xmlns:a="http://schemas.openxmlformats.org/drawingml/2006/main">
               <a:ext uri="{FF2B5EF4-FFF2-40B4-BE49-F238E27FC236}">
-                <a16:creationId xmlns:a16="http://schemas.microsoft.com/office/drawing/2014/main" id="{2D385111-72DC-4D6E-B120-AA9C0C0DB576}"/>
+                <a16:creationId xmlns:a16="http://schemas.microsoft.com/office/drawing/2014/main" id="{1F33C8B3-75CF-4AB9-A349-6CD9C9E5710C}"/>
               </a:ext>
             </a:extLst>
           </p:cNvPr>
@@ -11926,7 +11934,7 @@
           <p:cNvPr id="3" name="">
             <a:extLst xmlns:a="http://schemas.openxmlformats.org/drawingml/2006/main">
               <a:ext uri="{FF2B5EF4-FFF2-40B4-BE49-F238E27FC236}">
-                <a16:creationId xmlns:a16="http://schemas.microsoft.com/office/drawing/2014/main" id="{84E51881-01E5-4CEA-980A-F5A65CA34DF7}"/>
+                <a16:creationId xmlns:a16="http://schemas.microsoft.com/office/drawing/2014/main" id="{7C506508-9A81-41CC-B938-A017E6823924}"/>
               </a:ext>
             </a:extLst>
           </p:cNvPr>
@@ -11958,7 +11966,7 @@
           <p:cNvPr id="4" name="">
             <a:extLst xmlns:a="http://schemas.openxmlformats.org/drawingml/2006/main">
               <a:ext uri="{FF2B5EF4-FFF2-40B4-BE49-F238E27FC236}">
-                <a16:creationId xmlns:a16="http://schemas.microsoft.com/office/drawing/2014/main" id="{3F3597F5-CAC2-458B-BDA3-54CF85203E82}"/>
+                <a16:creationId xmlns:a16="http://schemas.microsoft.com/office/drawing/2014/main" id="{01482AF0-D63B-4B50-A7FF-6FCF29C4C12E}"/>
               </a:ext>
             </a:extLst>
           </p:cNvPr>
@@ -12015,7 +12023,7 @@
           <p:cNvPr id="5" name="">
             <a:extLst xmlns:a="http://schemas.openxmlformats.org/drawingml/2006/main">
               <a:ext uri="{FF2B5EF4-FFF2-40B4-BE49-F238E27FC236}">
-                <a16:creationId xmlns:a16="http://schemas.microsoft.com/office/drawing/2014/main" id="{828F4B5F-C4B8-4726-B0FD-143D305ED34F}"/>
+                <a16:creationId xmlns:a16="http://schemas.microsoft.com/office/drawing/2014/main" id="{8D4BE2AC-3F53-40FA-9E11-E3845667E9D8}"/>
               </a:ext>
             </a:extLst>
           </p:cNvPr>
@@ -12072,7 +12080,7 @@
           <p:cNvPr id="6" name="">
             <a:extLst xmlns:a="http://schemas.openxmlformats.org/drawingml/2006/main">
               <a:ext uri="{FF2B5EF4-FFF2-40B4-BE49-F238E27FC236}">
-                <a16:creationId xmlns:a16="http://schemas.microsoft.com/office/drawing/2014/main" id="{819758B7-5FBA-4ED3-8526-D3EB5F2EC9FE}"/>
+                <a16:creationId xmlns:a16="http://schemas.microsoft.com/office/drawing/2014/main" id="{8312064D-081E-4FB7-B591-4A83DA470EFD}"/>
               </a:ext>
             </a:extLst>
           </p:cNvPr>
@@ -12129,7 +12137,7 @@
           <p:cNvPr id="7" name="">
             <a:extLst xmlns:a="http://schemas.openxmlformats.org/drawingml/2006/main">
               <a:ext uri="{FF2B5EF4-FFF2-40B4-BE49-F238E27FC236}">
-                <a16:creationId xmlns:a16="http://schemas.microsoft.com/office/drawing/2014/main" id="{15342CD8-7877-4BDB-B829-866724567905}"/>
+                <a16:creationId xmlns:a16="http://schemas.microsoft.com/office/drawing/2014/main" id="{DB2213E5-D061-4C1C-B54B-63473E59693E}"/>
               </a:ext>
             </a:extLst>
           </p:cNvPr>
@@ -12161,7 +12169,7 @@
           <p:cNvPr id="8" name="">
             <a:extLst xmlns:a="http://schemas.openxmlformats.org/drawingml/2006/main">
               <a:ext uri="{FF2B5EF4-FFF2-40B4-BE49-F238E27FC236}">
-                <a16:creationId xmlns:a16="http://schemas.microsoft.com/office/drawing/2014/main" id="{BE77B7FB-F0CC-4127-94CD-BC7291199761}"/>
+                <a16:creationId xmlns:a16="http://schemas.microsoft.com/office/drawing/2014/main" id="{8A934CE8-B2F9-416F-9539-A1FC61315477}"/>
               </a:ext>
             </a:extLst>
           </p:cNvPr>
@@ -12218,7 +12226,7 @@
           <p:cNvPr id="9" name="">
             <a:extLst xmlns:a="http://schemas.openxmlformats.org/drawingml/2006/main">
               <a:ext uri="{FF2B5EF4-FFF2-40B4-BE49-F238E27FC236}">
-                <a16:creationId xmlns:a16="http://schemas.microsoft.com/office/drawing/2014/main" id="{811D5F42-CE77-4289-A83B-F7ACF6389623}"/>
+                <a16:creationId xmlns:a16="http://schemas.microsoft.com/office/drawing/2014/main" id="{4C2A9FA7-2478-4D6D-A3AA-DE6A51A434F1}"/>
               </a:ext>
             </a:extLst>
           </p:cNvPr>
@@ -12275,7 +12283,7 @@
           <p:cNvPr id="10" name="">
             <a:extLst xmlns:a="http://schemas.openxmlformats.org/drawingml/2006/main">
               <a:ext uri="{FF2B5EF4-FFF2-40B4-BE49-F238E27FC236}">
-                <a16:creationId xmlns:a16="http://schemas.microsoft.com/office/drawing/2014/main" id="{5008C114-6765-40D6-BA35-698180E64EEE}"/>
+                <a16:creationId xmlns:a16="http://schemas.microsoft.com/office/drawing/2014/main" id="{941DD704-EF53-4AF9-BB98-73DF7A9F83D5}"/>
               </a:ext>
             </a:extLst>
           </p:cNvPr>
@@ -12309,7 +12317,7 @@
           <p:cNvPr id="11" name="">
             <a:extLst xmlns:a="http://schemas.openxmlformats.org/drawingml/2006/main">
               <a:ext uri="{FF2B5EF4-FFF2-40B4-BE49-F238E27FC236}">
-                <a16:creationId xmlns:a16="http://schemas.microsoft.com/office/drawing/2014/main" id="{3096EE34-5DB7-4D83-B49E-2B63C8A8BC23}"/>
+                <a16:creationId xmlns:a16="http://schemas.microsoft.com/office/drawing/2014/main" id="{FE04CFF6-5447-4BE0-B309-7B455DEB0B48}"/>
               </a:ext>
             </a:extLst>
           </p:cNvPr>
@@ -12341,7 +12349,7 @@
           <p:cNvPr id="12" name="">
             <a:extLst xmlns:a="http://schemas.openxmlformats.org/drawingml/2006/main">
               <a:ext uri="{FF2B5EF4-FFF2-40B4-BE49-F238E27FC236}">
-                <a16:creationId xmlns:a16="http://schemas.microsoft.com/office/drawing/2014/main" id="{B2B49008-DF71-4B19-8BFC-3DB80FFEF33A}"/>
+                <a16:creationId xmlns:a16="http://schemas.microsoft.com/office/drawing/2014/main" id="{43336E3C-6229-4275-8837-19F800A2E531}"/>
               </a:ext>
             </a:extLst>
           </p:cNvPr>
@@ -12398,7 +12406,7 @@
           <p:cNvPr id="13" name="">
             <a:extLst xmlns:a="http://schemas.openxmlformats.org/drawingml/2006/main">
               <a:ext uri="{FF2B5EF4-FFF2-40B4-BE49-F238E27FC236}">
-                <a16:creationId xmlns:a16="http://schemas.microsoft.com/office/drawing/2014/main" id="{DC04E2D1-7C11-462E-9110-108413700FD9}"/>
+                <a16:creationId xmlns:a16="http://schemas.microsoft.com/office/drawing/2014/main" id="{26786E6A-64E7-46AF-A801-52857765022E}"/>
               </a:ext>
             </a:extLst>
           </p:cNvPr>
@@ -12455,7 +12463,7 @@
           <p:cNvPr id="14" name="">
             <a:extLst xmlns:a="http://schemas.openxmlformats.org/drawingml/2006/main">
               <a:ext uri="{FF2B5EF4-FFF2-40B4-BE49-F238E27FC236}">
-                <a16:creationId xmlns:a16="http://schemas.microsoft.com/office/drawing/2014/main" id="{8D97718B-876E-4E18-AAC0-3C8F32B93A1C}"/>
+                <a16:creationId xmlns:a16="http://schemas.microsoft.com/office/drawing/2014/main" id="{22B4A99C-C3EF-4B4B-AF39-679308A49413}"/>
               </a:ext>
             </a:extLst>
           </p:cNvPr>
@@ -12489,7 +12497,7 @@
           <p:cNvPr id="15" name="">
             <a:extLst xmlns:a="http://schemas.openxmlformats.org/drawingml/2006/main">
               <a:ext uri="{FF2B5EF4-FFF2-40B4-BE49-F238E27FC236}">
-                <a16:creationId xmlns:a16="http://schemas.microsoft.com/office/drawing/2014/main" id="{1C9E6DA7-1138-4040-871B-634D8A490ED5}"/>
+                <a16:creationId xmlns:a16="http://schemas.microsoft.com/office/drawing/2014/main" id="{2CB6C789-4BB0-4644-8764-4E2782036A24}"/>
               </a:ext>
             </a:extLst>
           </p:cNvPr>
@@ -12521,7 +12529,7 @@
           <p:cNvPr id="16" name="">
             <a:extLst xmlns:a="http://schemas.openxmlformats.org/drawingml/2006/main">
               <a:ext uri="{FF2B5EF4-FFF2-40B4-BE49-F238E27FC236}">
-                <a16:creationId xmlns:a16="http://schemas.microsoft.com/office/drawing/2014/main" id="{3182F109-6F9E-4FD8-AA7D-87C151A10425}"/>
+                <a16:creationId xmlns:a16="http://schemas.microsoft.com/office/drawing/2014/main" id="{60C8FC80-7FF8-4DBC-9DB4-1F2A38FE883C}"/>
               </a:ext>
             </a:extLst>
           </p:cNvPr>
@@ -12578,7 +12586,7 @@
           <p:cNvPr id="17" name="">
             <a:extLst xmlns:a="http://schemas.openxmlformats.org/drawingml/2006/main">
               <a:ext uri="{FF2B5EF4-FFF2-40B4-BE49-F238E27FC236}">
-                <a16:creationId xmlns:a16="http://schemas.microsoft.com/office/drawing/2014/main" id="{CF585E10-64B8-4486-93AA-5892B0BF5A84}"/>
+                <a16:creationId xmlns:a16="http://schemas.microsoft.com/office/drawing/2014/main" id="{97CC330B-760D-481B-8813-E05259B53888}"/>
               </a:ext>
             </a:extLst>
           </p:cNvPr>
@@ -12635,7 +12643,7 @@
           <p:cNvPr id="18" name="">
             <a:extLst xmlns:a="http://schemas.openxmlformats.org/drawingml/2006/main">
               <a:ext uri="{FF2B5EF4-FFF2-40B4-BE49-F238E27FC236}">
-                <a16:creationId xmlns:a16="http://schemas.microsoft.com/office/drawing/2014/main" id="{9E0DCFE8-7696-4402-AEA9-34105185155F}"/>
+                <a16:creationId xmlns:a16="http://schemas.microsoft.com/office/drawing/2014/main" id="{47FFC4A7-9CF9-4F1D-A5AC-EEA737054EF1}"/>
               </a:ext>
             </a:extLst>
           </p:cNvPr>
@@ -12669,7 +12677,7 @@
           <p:cNvPr id="19" name="">
             <a:extLst xmlns:a="http://schemas.openxmlformats.org/drawingml/2006/main">
               <a:ext uri="{FF2B5EF4-FFF2-40B4-BE49-F238E27FC236}">
-                <a16:creationId xmlns:a16="http://schemas.microsoft.com/office/drawing/2014/main" id="{F9A16BE5-C1E8-4B6A-BA23-0B4BDFD572B2}"/>
+                <a16:creationId xmlns:a16="http://schemas.microsoft.com/office/drawing/2014/main" id="{72F265F9-12C2-4B8A-B7ED-7EF816EEA273}"/>
               </a:ext>
             </a:extLst>
           </p:cNvPr>
@@ -12701,7 +12709,7 @@
           <p:cNvPr id="20" name="">
             <a:extLst xmlns:a="http://schemas.openxmlformats.org/drawingml/2006/main">
               <a:ext uri="{FF2B5EF4-FFF2-40B4-BE49-F238E27FC236}">
-                <a16:creationId xmlns:a16="http://schemas.microsoft.com/office/drawing/2014/main" id="{553F68A5-9548-4A52-B2D3-10969816679D}"/>
+                <a16:creationId xmlns:a16="http://schemas.microsoft.com/office/drawing/2014/main" id="{31F6F1FE-3056-4172-8808-47C79AC5780B}"/>
               </a:ext>
             </a:extLst>
           </p:cNvPr>
@@ -12758,7 +12766,7 @@
           <p:cNvPr id="21" name="">
             <a:extLst xmlns:a="http://schemas.openxmlformats.org/drawingml/2006/main">
               <a:ext uri="{FF2B5EF4-FFF2-40B4-BE49-F238E27FC236}">
-                <a16:creationId xmlns:a16="http://schemas.microsoft.com/office/drawing/2014/main" id="{23D711D9-F6CF-41E6-8D8E-31C87202DD3D}"/>
+                <a16:creationId xmlns:a16="http://schemas.microsoft.com/office/drawing/2014/main" id="{368DF6A5-2545-4C29-B2B3-351A6BAF0CBD}"/>
               </a:ext>
             </a:extLst>
           </p:cNvPr>
@@ -12815,7 +12823,7 @@
           <p:cNvPr id="22" name="">
             <a:extLst xmlns:a="http://schemas.openxmlformats.org/drawingml/2006/main">
               <a:ext uri="{FF2B5EF4-FFF2-40B4-BE49-F238E27FC236}">
-                <a16:creationId xmlns:a16="http://schemas.microsoft.com/office/drawing/2014/main" id="{4DD85C94-5B74-4FCA-8A5B-83ACFD91A619}"/>
+                <a16:creationId xmlns:a16="http://schemas.microsoft.com/office/drawing/2014/main" id="{5155CBD4-3DB1-45AD-952C-83EFD25A9A66}"/>
               </a:ext>
             </a:extLst>
           </p:cNvPr>
@@ -12870,7 +12878,7 @@
     </p:spTree>
     <p:extLst>
       <p:ext uri="{BB962C8B-B14F-4D97-AF65-F5344CB8AC3E}">
-        <p14:creationId xmlns:p14="http://schemas.microsoft.com/office/powerpoint/2010/main" val="1633867331"/>
+        <p14:creationId xmlns:p14="http://schemas.microsoft.com/office/powerpoint/2010/main" val="1840080778"/>
       </p:ext>
     </p:extLst>
   </p:cSld>
@@ -13071,7 +13079,7 @@
           <p:cNvPr id="22" name="">
             <a:extLst xmlns:a="http://schemas.openxmlformats.org/drawingml/2006/main">
               <a:ext uri="{FF2B5EF4-FFF2-40B4-BE49-F238E27FC236}">
-                <a16:creationId xmlns:a16="http://schemas.microsoft.com/office/drawing/2014/main" id="{952F2279-9686-4CB0-93D3-1DA369F2E679}"/>
+                <a16:creationId xmlns:a16="http://schemas.microsoft.com/office/drawing/2014/main" id="{87E82683-C374-4639-814E-8BC22862CA0F}"/>
               </a:ext>
             </a:extLst>
           </p:cNvPr>
@@ -13103,7 +13111,7 @@
           <p:cNvPr id="2" name="">
             <a:extLst xmlns:a="http://schemas.openxmlformats.org/drawingml/2006/main">
               <a:ext uri="{FF2B5EF4-FFF2-40B4-BE49-F238E27FC236}">
-                <a16:creationId xmlns:a16="http://schemas.microsoft.com/office/drawing/2014/main" id="{FB3BD5E1-972B-43C4-98C0-C47A73650919}"/>
+                <a16:creationId xmlns:a16="http://schemas.microsoft.com/office/drawing/2014/main" id="{F83D367D-4DC8-4346-A933-7E4452681019}"/>
               </a:ext>
             </a:extLst>
           </p:cNvPr>
@@ -13160,7 +13168,7 @@
           <p:cNvPr id="3" name="">
             <a:extLst xmlns:a="http://schemas.openxmlformats.org/drawingml/2006/main">
               <a:ext uri="{FF2B5EF4-FFF2-40B4-BE49-F238E27FC236}">
-                <a16:creationId xmlns:a16="http://schemas.microsoft.com/office/drawing/2014/main" id="{8E83489C-E1ED-484F-8134-758521DF8E9B}"/>
+                <a16:creationId xmlns:a16="http://schemas.microsoft.com/office/drawing/2014/main" id="{03134EC6-3BC9-434C-9BCE-6FAB29E845A3}"/>
               </a:ext>
             </a:extLst>
           </p:cNvPr>
@@ -13192,7 +13200,7 @@
           <p:cNvPr id="4" name="">
             <a:extLst xmlns:a="http://schemas.openxmlformats.org/drawingml/2006/main">
               <a:ext uri="{FF2B5EF4-FFF2-40B4-BE49-F238E27FC236}">
-                <a16:creationId xmlns:a16="http://schemas.microsoft.com/office/drawing/2014/main" id="{F4B71B56-2314-4993-AA59-11003AF73F10}"/>
+                <a16:creationId xmlns:a16="http://schemas.microsoft.com/office/drawing/2014/main" id="{CA174A56-87C4-4EE6-90AB-F57396B0A74E}"/>
               </a:ext>
             </a:extLst>
           </p:cNvPr>
@@ -13249,7 +13257,7 @@
           <p:cNvPr id="5" name="">
             <a:extLst xmlns:a="http://schemas.openxmlformats.org/drawingml/2006/main">
               <a:ext uri="{FF2B5EF4-FFF2-40B4-BE49-F238E27FC236}">
-                <a16:creationId xmlns:a16="http://schemas.microsoft.com/office/drawing/2014/main" id="{FE9EC6A8-6FCD-47B7-BBF4-B707250AFC94}"/>
+                <a16:creationId xmlns:a16="http://schemas.microsoft.com/office/drawing/2014/main" id="{BEDFDB7F-23F3-4EFB-9AD1-CBC271F455E3}"/>
               </a:ext>
             </a:extLst>
           </p:cNvPr>
@@ -13306,7 +13314,7 @@
           <p:cNvPr id="6" name="">
             <a:extLst xmlns:a="http://schemas.openxmlformats.org/drawingml/2006/main">
               <a:ext uri="{FF2B5EF4-FFF2-40B4-BE49-F238E27FC236}">
-                <a16:creationId xmlns:a16="http://schemas.microsoft.com/office/drawing/2014/main" id="{F0A36F8D-95E2-4656-950F-0EA13DEF2502}"/>
+                <a16:creationId xmlns:a16="http://schemas.microsoft.com/office/drawing/2014/main" id="{6F6D5DE9-DFE1-4944-A500-D9563BC09E97}"/>
               </a:ext>
             </a:extLst>
           </p:cNvPr>
@@ -13363,7 +13371,7 @@
           <p:cNvPr id="7" name="">
             <a:extLst xmlns:a="http://schemas.openxmlformats.org/drawingml/2006/main">
               <a:ext uri="{FF2B5EF4-FFF2-40B4-BE49-F238E27FC236}">
-                <a16:creationId xmlns:a16="http://schemas.microsoft.com/office/drawing/2014/main" id="{AA299026-B3C6-4293-ACB3-88E1F99E0887}"/>
+                <a16:creationId xmlns:a16="http://schemas.microsoft.com/office/drawing/2014/main" id="{117252DC-6F2A-4D1F-A3EC-8E5182F73DA3}"/>
               </a:ext>
             </a:extLst>
           </p:cNvPr>
@@ -13395,7 +13403,7 @@
           <p:cNvPr id="8" name="">
             <a:extLst xmlns:a="http://schemas.openxmlformats.org/drawingml/2006/main">
               <a:ext uri="{FF2B5EF4-FFF2-40B4-BE49-F238E27FC236}">
-                <a16:creationId xmlns:a16="http://schemas.microsoft.com/office/drawing/2014/main" id="{88BEBBDA-DBC3-4DB0-B34D-9A0F11A74788}"/>
+                <a16:creationId xmlns:a16="http://schemas.microsoft.com/office/drawing/2014/main" id="{05055AEF-FA3E-4CBD-9814-5C6D647FB436}"/>
               </a:ext>
             </a:extLst>
           </p:cNvPr>
@@ -13452,7 +13460,7 @@
           <p:cNvPr id="9" name="">
             <a:extLst xmlns:a="http://schemas.openxmlformats.org/drawingml/2006/main">
               <a:ext uri="{FF2B5EF4-FFF2-40B4-BE49-F238E27FC236}">
-                <a16:creationId xmlns:a16="http://schemas.microsoft.com/office/drawing/2014/main" id="{21919854-6B5B-4072-B9DA-A692CABEFEA7}"/>
+                <a16:creationId xmlns:a16="http://schemas.microsoft.com/office/drawing/2014/main" id="{C4FB3DE9-46CC-4F49-807D-AFB31313E16C}"/>
               </a:ext>
             </a:extLst>
           </p:cNvPr>
@@ -13509,7 +13517,7 @@
           <p:cNvPr id="10" name="">
             <a:extLst xmlns:a="http://schemas.openxmlformats.org/drawingml/2006/main">
               <a:ext uri="{FF2B5EF4-FFF2-40B4-BE49-F238E27FC236}">
-                <a16:creationId xmlns:a16="http://schemas.microsoft.com/office/drawing/2014/main" id="{058B3E1C-200A-4035-959B-65EC59925EC0}"/>
+                <a16:creationId xmlns:a16="http://schemas.microsoft.com/office/drawing/2014/main" id="{CC473367-2D5F-4CD9-A46B-C8D7A902864F}"/>
               </a:ext>
             </a:extLst>
           </p:cNvPr>
@@ -13543,7 +13551,7 @@
           <p:cNvPr id="11" name="">
             <a:extLst xmlns:a="http://schemas.openxmlformats.org/drawingml/2006/main">
               <a:ext uri="{FF2B5EF4-FFF2-40B4-BE49-F238E27FC236}">
-                <a16:creationId xmlns:a16="http://schemas.microsoft.com/office/drawing/2014/main" id="{B68CB3DD-9D30-49BA-9CFF-565A5A13CE07}"/>
+                <a16:creationId xmlns:a16="http://schemas.microsoft.com/office/drawing/2014/main" id="{86B1EB38-6988-401B-97B8-030953BBC17F}"/>
               </a:ext>
             </a:extLst>
           </p:cNvPr>
@@ -13575,7 +13583,7 @@
           <p:cNvPr id="12" name="">
             <a:extLst xmlns:a="http://schemas.openxmlformats.org/drawingml/2006/main">
               <a:ext uri="{FF2B5EF4-FFF2-40B4-BE49-F238E27FC236}">
-                <a16:creationId xmlns:a16="http://schemas.microsoft.com/office/drawing/2014/main" id="{EF2807C5-B240-47CA-8B93-B20810B6073F}"/>
+                <a16:creationId xmlns:a16="http://schemas.microsoft.com/office/drawing/2014/main" id="{22C7FD77-A722-4358-9624-D9C340FD8FF5}"/>
               </a:ext>
             </a:extLst>
           </p:cNvPr>
@@ -13632,7 +13640,7 @@
           <p:cNvPr id="13" name="">
             <a:extLst xmlns:a="http://schemas.openxmlformats.org/drawingml/2006/main">
               <a:ext uri="{FF2B5EF4-FFF2-40B4-BE49-F238E27FC236}">
-                <a16:creationId xmlns:a16="http://schemas.microsoft.com/office/drawing/2014/main" id="{373C5146-0893-4690-AC07-A71967606E6B}"/>
+                <a16:creationId xmlns:a16="http://schemas.microsoft.com/office/drawing/2014/main" id="{82C60887-5F4F-4828-8367-B3B038C192B9}"/>
               </a:ext>
             </a:extLst>
           </p:cNvPr>
@@ -13689,7 +13697,7 @@
           <p:cNvPr id="14" name="">
             <a:extLst xmlns:a="http://schemas.openxmlformats.org/drawingml/2006/main">
               <a:ext uri="{FF2B5EF4-FFF2-40B4-BE49-F238E27FC236}">
-                <a16:creationId xmlns:a16="http://schemas.microsoft.com/office/drawing/2014/main" id="{41D35578-ACEB-4EB9-BB3D-BDDAD6DEA22F}"/>
+                <a16:creationId xmlns:a16="http://schemas.microsoft.com/office/drawing/2014/main" id="{2CAF947A-4C45-4AE8-87CA-E10934F1B0C1}"/>
               </a:ext>
             </a:extLst>
           </p:cNvPr>
@@ -13723,7 +13731,7 @@
           <p:cNvPr id="15" name="">
             <a:extLst xmlns:a="http://schemas.openxmlformats.org/drawingml/2006/main">
               <a:ext uri="{FF2B5EF4-FFF2-40B4-BE49-F238E27FC236}">
-                <a16:creationId xmlns:a16="http://schemas.microsoft.com/office/drawing/2014/main" id="{7E00CB01-F148-41CF-A5CF-3F8D3AD788B7}"/>
+                <a16:creationId xmlns:a16="http://schemas.microsoft.com/office/drawing/2014/main" id="{C61A1190-9EE0-42EB-95EE-63C38ECFD1B8}"/>
               </a:ext>
             </a:extLst>
           </p:cNvPr>
@@ -13755,7 +13763,7 @@
           <p:cNvPr id="16" name="">
             <a:extLst xmlns:a="http://schemas.openxmlformats.org/drawingml/2006/main">
               <a:ext uri="{FF2B5EF4-FFF2-40B4-BE49-F238E27FC236}">
-                <a16:creationId xmlns:a16="http://schemas.microsoft.com/office/drawing/2014/main" id="{0CC91489-365A-4312-859E-C4DAC2EEA689}"/>
+                <a16:creationId xmlns:a16="http://schemas.microsoft.com/office/drawing/2014/main" id="{891900EA-8925-4050-B6DD-126C969B9A80}"/>
               </a:ext>
             </a:extLst>
           </p:cNvPr>
@@ -13812,7 +13820,7 @@
           <p:cNvPr id="17" name="">
             <a:extLst xmlns:a="http://schemas.openxmlformats.org/drawingml/2006/main">
               <a:ext uri="{FF2B5EF4-FFF2-40B4-BE49-F238E27FC236}">
-                <a16:creationId xmlns:a16="http://schemas.microsoft.com/office/drawing/2014/main" id="{7FB57F0D-9190-481B-AFD3-3EF2C8EA14B5}"/>
+                <a16:creationId xmlns:a16="http://schemas.microsoft.com/office/drawing/2014/main" id="{3CD2C133-188D-459E-A2C1-2E1FC920B342}"/>
               </a:ext>
             </a:extLst>
           </p:cNvPr>
@@ -13869,7 +13877,7 @@
           <p:cNvPr id="18" name="">
             <a:extLst xmlns:a="http://schemas.openxmlformats.org/drawingml/2006/main">
               <a:ext uri="{FF2B5EF4-FFF2-40B4-BE49-F238E27FC236}">
-                <a16:creationId xmlns:a16="http://schemas.microsoft.com/office/drawing/2014/main" id="{AD9F94AC-6D14-4071-89EB-44F162CC7098}"/>
+                <a16:creationId xmlns:a16="http://schemas.microsoft.com/office/drawing/2014/main" id="{263EB4D9-04B4-4000-8826-5A841E3FF30F}"/>
               </a:ext>
             </a:extLst>
           </p:cNvPr>
@@ -13903,7 +13911,7 @@
           <p:cNvPr id="19" name="">
             <a:extLst xmlns:a="http://schemas.openxmlformats.org/drawingml/2006/main">
               <a:ext uri="{FF2B5EF4-FFF2-40B4-BE49-F238E27FC236}">
-                <a16:creationId xmlns:a16="http://schemas.microsoft.com/office/drawing/2014/main" id="{1910DF87-4CA2-4A3D-A055-C8CAF5C0243E}"/>
+                <a16:creationId xmlns:a16="http://schemas.microsoft.com/office/drawing/2014/main" id="{EF4AA0E0-9AD5-481C-8837-E8CA80D16BF5}"/>
               </a:ext>
             </a:extLst>
           </p:cNvPr>
@@ -13935,7 +13943,7 @@
           <p:cNvPr id="20" name="">
             <a:extLst xmlns:a="http://schemas.openxmlformats.org/drawingml/2006/main">
               <a:ext uri="{FF2B5EF4-FFF2-40B4-BE49-F238E27FC236}">
-                <a16:creationId xmlns:a16="http://schemas.microsoft.com/office/drawing/2014/main" id="{FE5F7BA6-32EC-46EB-AED1-FEEBFFFA6492}"/>
+                <a16:creationId xmlns:a16="http://schemas.microsoft.com/office/drawing/2014/main" id="{46F6DCB1-BD2E-41DA-9EE4-B90D4C75285D}"/>
               </a:ext>
             </a:extLst>
           </p:cNvPr>
@@ -13992,7 +14000,7 @@
           <p:cNvPr id="21" name="">
             <a:extLst xmlns:a="http://schemas.openxmlformats.org/drawingml/2006/main">
               <a:ext uri="{FF2B5EF4-FFF2-40B4-BE49-F238E27FC236}">
-                <a16:creationId xmlns:a16="http://schemas.microsoft.com/office/drawing/2014/main" id="{1E12993D-FB80-4F7B-B132-ED7F5C4B7D9C}"/>
+                <a16:creationId xmlns:a16="http://schemas.microsoft.com/office/drawing/2014/main" id="{7B14FD37-FA9F-4108-BF49-F46F86A685EA}"/>
               </a:ext>
             </a:extLst>
           </p:cNvPr>
@@ -14047,7 +14055,7 @@
     </p:spTree>
     <p:extLst>
       <p:ext uri="{BB962C8B-B14F-4D97-AF65-F5344CB8AC3E}">
-        <p14:creationId xmlns:p14="http://schemas.microsoft.com/office/powerpoint/2010/main" val="2082768300"/>
+        <p14:creationId xmlns:p14="http://schemas.microsoft.com/office/powerpoint/2010/main" val="1660539101"/>
       </p:ext>
     </p:extLst>
   </p:cSld>
